--- a/Диплом/Презентация/Бородина_Анастасия_Владимировна_2207Д2.pptx
+++ b/Диплом/Презентация/Бородина_Анастасия_Владимировна_2207Д2.pptx
@@ -1,11 +1,11 @@
 
 <file path=ppt/presentation.xml><?xml version="1.0" encoding="utf-8"?>
-<p:presentation xmlns:a="http://schemas.openxmlformats.org/drawingml/2006/main" xmlns:r="http://schemas.openxmlformats.org/officeDocument/2006/relationships" xmlns:p="http://schemas.openxmlformats.org/presentationml/2006/main" saveSubsetFonts="1">
+<p:presentation xmlns:a="http://schemas.openxmlformats.org/drawingml/2006/main" xmlns:r="http://schemas.openxmlformats.org/officeDocument/2006/relationships" xmlns:p="http://schemas.openxmlformats.org/presentationml/2006/main" showSpecialPlsOnTitleSld="0" saveSubsetFonts="1">
   <p:sldMasterIdLst>
     <p:sldMasterId id="2147483648" r:id="rId1"/>
   </p:sldMasterIdLst>
   <p:notesMasterIdLst>
-    <p:notesMasterId r:id="rId14"/>
+    <p:notesMasterId r:id="rId17"/>
   </p:notesMasterIdLst>
   <p:sldIdLst>
     <p:sldId id="257" r:id="rId2"/>
@@ -13,13 +13,16 @@
     <p:sldId id="261" r:id="rId4"/>
     <p:sldId id="260" r:id="rId5"/>
     <p:sldId id="262" r:id="rId6"/>
-    <p:sldId id="264" r:id="rId7"/>
-    <p:sldId id="265" r:id="rId8"/>
-    <p:sldId id="263" r:id="rId9"/>
+    <p:sldId id="265" r:id="rId7"/>
+    <p:sldId id="264" r:id="rId8"/>
+    <p:sldId id="269" r:id="rId9"/>
     <p:sldId id="266" r:id="rId10"/>
-    <p:sldId id="268" r:id="rId11"/>
-    <p:sldId id="267" r:id="rId12"/>
-    <p:sldId id="259" r:id="rId13"/>
+    <p:sldId id="271" r:id="rId11"/>
+    <p:sldId id="263" r:id="rId12"/>
+    <p:sldId id="270" r:id="rId13"/>
+    <p:sldId id="267" r:id="rId14"/>
+    <p:sldId id="268" r:id="rId15"/>
+    <p:sldId id="259" r:id="rId16"/>
   </p:sldIdLst>
   <p:sldSz cx="12192000" cy="6858000"/>
   <p:notesSz cx="6858000" cy="9144000"/>
@@ -220,7 +223,7 @@
             <a:fld id="{2CBAF322-1614-4B94-B6A1-B76658E349DC}" type="datetimeFigureOut">
               <a:rPr lang="ru-RU" smtClean="0"/>
               <a:pPr/>
-              <a:t>22.12.2025</a:t>
+              <a:t>06.05.2026</a:t>
             </a:fld>
             <a:endParaRPr lang="ru-RU"/>
           </a:p>
@@ -633,10 +636,9 @@
           <a:bodyPr/>
           <a:lstStyle/>
           <a:p>
-            <a:fld id="{C9392180-FD14-4913-9D18-66C9AD820358}" type="datetimeFigureOut">
+            <a:fld id="{929F2640-2EF4-4A43-9842-276C25197E25}" type="datetime1">
               <a:rPr lang="ru-RU" smtClean="0"/>
-              <a:pPr/>
-              <a:t>22.12.2025</a:t>
+              <a:t>06.05.2026</a:t>
             </a:fld>
             <a:endParaRPr lang="ru-RU"/>
           </a:p>
@@ -833,10 +835,9 @@
           <a:bodyPr/>
           <a:lstStyle/>
           <a:p>
-            <a:fld id="{C9392180-FD14-4913-9D18-66C9AD820358}" type="datetimeFigureOut">
+            <a:fld id="{FA7AEEE2-DC8F-4C66-9038-4CB95A7529D0}" type="datetime1">
               <a:rPr lang="ru-RU" smtClean="0"/>
-              <a:pPr/>
-              <a:t>22.12.2025</a:t>
+              <a:t>06.05.2026</a:t>
             </a:fld>
             <a:endParaRPr lang="ru-RU"/>
           </a:p>
@@ -1043,10 +1044,9 @@
           <a:bodyPr/>
           <a:lstStyle/>
           <a:p>
-            <a:fld id="{C9392180-FD14-4913-9D18-66C9AD820358}" type="datetimeFigureOut">
+            <a:fld id="{E86C36E5-C478-443C-BAEF-26B63FBE0A6B}" type="datetime1">
               <a:rPr lang="ru-RU" smtClean="0"/>
-              <a:pPr/>
-              <a:t>22.12.2025</a:t>
+              <a:t>06.05.2026</a:t>
             </a:fld>
             <a:endParaRPr lang="ru-RU"/>
           </a:p>
@@ -1243,10 +1243,9 @@
           <a:bodyPr/>
           <a:lstStyle/>
           <a:p>
-            <a:fld id="{C9392180-FD14-4913-9D18-66C9AD820358}" type="datetimeFigureOut">
+            <a:fld id="{1D830A2B-E972-4650-9194-9F682251A062}" type="datetime1">
               <a:rPr lang="ru-RU" smtClean="0"/>
-              <a:pPr/>
-              <a:t>22.12.2025</a:t>
+              <a:t>06.05.2026</a:t>
             </a:fld>
             <a:endParaRPr lang="ru-RU"/>
           </a:p>
@@ -1520,10 +1519,9 @@
           <a:bodyPr/>
           <a:lstStyle/>
           <a:p>
-            <a:fld id="{C9392180-FD14-4913-9D18-66C9AD820358}" type="datetimeFigureOut">
+            <a:fld id="{73089D3F-9628-40A0-8CDF-BFC5BF8A512E}" type="datetime1">
               <a:rPr lang="ru-RU" smtClean="0"/>
-              <a:pPr/>
-              <a:t>22.12.2025</a:t>
+              <a:t>06.05.2026</a:t>
             </a:fld>
             <a:endParaRPr lang="ru-RU"/>
           </a:p>
@@ -1787,10 +1785,9 @@
           <a:bodyPr/>
           <a:lstStyle/>
           <a:p>
-            <a:fld id="{C9392180-FD14-4913-9D18-66C9AD820358}" type="datetimeFigureOut">
+            <a:fld id="{994FC618-F43D-4137-885A-9D660F20BABE}" type="datetime1">
               <a:rPr lang="ru-RU" smtClean="0"/>
-              <a:pPr/>
-              <a:t>22.12.2025</a:t>
+              <a:t>06.05.2026</a:t>
             </a:fld>
             <a:endParaRPr lang="ru-RU"/>
           </a:p>
@@ -2201,10 +2198,9 @@
           <a:bodyPr/>
           <a:lstStyle/>
           <a:p>
-            <a:fld id="{C9392180-FD14-4913-9D18-66C9AD820358}" type="datetimeFigureOut">
+            <a:fld id="{68F59E0F-81D3-46F2-A21F-80B324275C0B}" type="datetime1">
               <a:rPr lang="ru-RU" smtClean="0"/>
-              <a:pPr/>
-              <a:t>22.12.2025</a:t>
+              <a:t>06.05.2026</a:t>
             </a:fld>
             <a:endParaRPr lang="ru-RU"/>
           </a:p>
@@ -2344,10 +2340,9 @@
           <a:bodyPr/>
           <a:lstStyle/>
           <a:p>
-            <a:fld id="{C9392180-FD14-4913-9D18-66C9AD820358}" type="datetimeFigureOut">
+            <a:fld id="{CBDF851B-9994-4471-A95F-63C98C94C25C}" type="datetime1">
               <a:rPr lang="ru-RU" smtClean="0"/>
-              <a:pPr/>
-              <a:t>22.12.2025</a:t>
+              <a:t>06.05.2026</a:t>
             </a:fld>
             <a:endParaRPr lang="ru-RU"/>
           </a:p>
@@ -2459,10 +2454,9 @@
           <a:bodyPr/>
           <a:lstStyle/>
           <a:p>
-            <a:fld id="{C9392180-FD14-4913-9D18-66C9AD820358}" type="datetimeFigureOut">
+            <a:fld id="{FE9C0E54-4CC8-47B6-A2ED-519E308C3D5C}" type="datetime1">
               <a:rPr lang="ru-RU" smtClean="0"/>
-              <a:pPr/>
-              <a:t>22.12.2025</a:t>
+              <a:t>06.05.2026</a:t>
             </a:fld>
             <a:endParaRPr lang="ru-RU"/>
           </a:p>
@@ -2772,10 +2766,9 @@
           <a:bodyPr/>
           <a:lstStyle/>
           <a:p>
-            <a:fld id="{C9392180-FD14-4913-9D18-66C9AD820358}" type="datetimeFigureOut">
+            <a:fld id="{B148578A-6CC4-494D-9939-AE0BC863DCC9}" type="datetime1">
               <a:rPr lang="ru-RU" smtClean="0"/>
-              <a:pPr/>
-              <a:t>22.12.2025</a:t>
+              <a:t>06.05.2026</a:t>
             </a:fld>
             <a:endParaRPr lang="ru-RU"/>
           </a:p>
@@ -3062,10 +3055,9 @@
           <a:bodyPr/>
           <a:lstStyle/>
           <a:p>
-            <a:fld id="{C9392180-FD14-4913-9D18-66C9AD820358}" type="datetimeFigureOut">
+            <a:fld id="{0D930757-F38F-41AC-A030-FD2A4ED4502C}" type="datetime1">
               <a:rPr lang="ru-RU" smtClean="0"/>
-              <a:pPr/>
-              <a:t>22.12.2025</a:t>
+              <a:t>06.05.2026</a:t>
             </a:fld>
             <a:endParaRPr lang="ru-RU"/>
           </a:p>
@@ -3305,10 +3297,9 @@
             </a:lvl1pPr>
           </a:lstStyle>
           <a:p>
-            <a:fld id="{C9392180-FD14-4913-9D18-66C9AD820358}" type="datetimeFigureOut">
+            <a:fld id="{FDEF9CD6-0EBB-4035-B231-EA9AEF8C103A}" type="datetime1">
               <a:rPr lang="ru-RU" smtClean="0"/>
-              <a:pPr/>
-              <a:t>22.12.2025</a:t>
+              <a:t>06.05.2026</a:t>
             </a:fld>
             <a:endParaRPr lang="ru-RU"/>
           </a:p>
@@ -3426,6 +3417,7 @@
     <p:sldLayoutId id="2147483658" r:id="rId10"/>
     <p:sldLayoutId id="2147483659" r:id="rId11"/>
   </p:sldLayoutIdLst>
+  <p:hf hdr="0" ftr="0" dt="0"/>
   <p:txStyles>
     <p:titleStyle>
       <a:lvl1pPr algn="l" defTabSz="914400" rtl="0" eaLnBrk="1" latinLnBrk="0" hangingPunct="1">
@@ -3757,30 +3749,35 @@
             <a:r>
               <a:rPr lang="ru-RU" sz="3200" b="1" dirty="0">
                 <a:latin typeface="+mn-lt"/>
+                <a:cs typeface="Times New Roman" panose="02020603050405020304" pitchFamily="18" charset="0"/>
               </a:rPr>
               <a:t>Разработка корпоративного веб-приложения для клонирования баз данных </a:t>
             </a:r>
             <a:r>
               <a:rPr lang="en-US" sz="3200" b="1" dirty="0">
                 <a:latin typeface="+mn-lt"/>
+                <a:cs typeface="Times New Roman" panose="02020603050405020304" pitchFamily="18" charset="0"/>
               </a:rPr>
               <a:t>MS SQL</a:t>
             </a:r>
             <a:r>
               <a:rPr lang="ru-RU" sz="3200" b="1" dirty="0">
                 <a:latin typeface="+mn-lt"/>
+                <a:cs typeface="Times New Roman" panose="02020603050405020304" pitchFamily="18" charset="0"/>
               </a:rPr>
               <a:t> </a:t>
             </a:r>
             <a:r>
               <a:rPr lang="en-US" sz="3200" b="1" dirty="0">
                 <a:latin typeface="+mn-lt"/>
+                <a:cs typeface="Times New Roman" panose="02020603050405020304" pitchFamily="18" charset="0"/>
               </a:rPr>
               <a:t>c</a:t>
             </a:r>
             <a:r>
               <a:rPr lang="ru-RU" sz="3200" b="1" dirty="0">
                 <a:latin typeface="+mn-lt"/>
+                <a:cs typeface="Times New Roman" panose="02020603050405020304" pitchFamily="18" charset="0"/>
               </a:rPr>
               <a:t> возможностью управления клонами и мониторингом</a:t>
             </a:r>
@@ -3816,13 +3813,17 @@
           <a:lstStyle/>
           <a:p>
             <a:r>
-              <a:rPr lang="ru-RU" b="1" dirty="0"/>
+              <a:rPr lang="ru-RU" b="1" dirty="0">
+                <a:cs typeface="Times New Roman" panose="02020603050405020304" pitchFamily="18" charset="0"/>
+              </a:rPr>
               <a:t>Высший колледж информатики Университета (ВКИ НГУ)</a:t>
             </a:r>
           </a:p>
           <a:p>
             <a:r>
-              <a:rPr lang="ru-RU" b="1" dirty="0"/>
+              <a:rPr lang="ru-RU" b="1" dirty="0">
+                <a:cs typeface="Times New Roman" panose="02020603050405020304" pitchFamily="18" charset="0"/>
+              </a:rPr>
               <a:t>Кафедра информатики</a:t>
             </a:r>
           </a:p>
@@ -3843,7 +3844,7 @@
           <p:nvPr>
             <p:extLst>
               <p:ext uri="{D42A27DB-BD31-4B8C-83A1-F6EECF244321}">
-                <p14:modId xmlns:p14="http://schemas.microsoft.com/office/powerpoint/2010/main" val="3975266511"/>
+                <p14:modId xmlns:p14="http://schemas.microsoft.com/office/powerpoint/2010/main" val="52879177"/>
               </p:ext>
             </p:extLst>
           </p:nvPr>
@@ -3887,6 +3888,8 @@
                             <a:schemeClr val="tx1"/>
                           </a:solidFill>
                           <a:effectLst/>
+                          <a:latin typeface="+mn-lt"/>
+                          <a:cs typeface="Times New Roman" panose="02020603050405020304" pitchFamily="18" charset="0"/>
                         </a:rPr>
                         <a:t>Руководитель </a:t>
                       </a:r>
@@ -3899,6 +3902,8 @@
                             <a:schemeClr val="tx1"/>
                           </a:solidFill>
                           <a:effectLst/>
+                          <a:latin typeface="+mn-lt"/>
+                          <a:cs typeface="Times New Roman" panose="02020603050405020304" pitchFamily="18" charset="0"/>
                         </a:rPr>
                         <a:t>инженер ВКИ НГУ</a:t>
                       </a:r>
@@ -3907,8 +3912,9 @@
                           <a:schemeClr val="tx1"/>
                         </a:solidFill>
                         <a:effectLst/>
-                        <a:latin typeface="Calibri" panose="020F0502020204030204" pitchFamily="34" charset="0"/>
+                        <a:latin typeface="+mn-lt"/>
                         <a:ea typeface="Calibri" panose="020F0502020204030204" pitchFamily="34" charset="0"/>
+                        <a:cs typeface="Times New Roman" panose="02020603050405020304" pitchFamily="18" charset="0"/>
                       </a:endParaRPr>
                     </a:p>
                   </a:txBody>
@@ -3930,6 +3936,8 @@
                             <a:schemeClr val="tx1"/>
                           </a:solidFill>
                           <a:effectLst/>
+                          <a:latin typeface="+mn-lt"/>
+                          <a:cs typeface="Times New Roman" panose="02020603050405020304" pitchFamily="18" charset="0"/>
                         </a:rPr>
                         <a:t>Цимбалист Г.Н.</a:t>
                       </a:r>
@@ -3960,6 +3968,8 @@
                             <a:schemeClr val="tx1"/>
                           </a:solidFill>
                           <a:effectLst/>
+                          <a:latin typeface="+mn-lt"/>
+                          <a:cs typeface="Times New Roman" panose="02020603050405020304" pitchFamily="18" charset="0"/>
                         </a:rPr>
                         <a:t>Студентка </a:t>
                       </a:r>
@@ -3969,6 +3979,8 @@
                             <a:schemeClr val="tx1"/>
                           </a:solidFill>
                           <a:effectLst/>
+                          <a:latin typeface="+mn-lt"/>
+                          <a:cs typeface="Times New Roman" panose="02020603050405020304" pitchFamily="18" charset="0"/>
                         </a:rPr>
                         <a:t>4</a:t>
                       </a:r>
@@ -3978,6 +3990,8 @@
                             <a:schemeClr val="tx1"/>
                           </a:solidFill>
                           <a:effectLst/>
+                          <a:latin typeface="+mn-lt"/>
+                          <a:cs typeface="Times New Roman" panose="02020603050405020304" pitchFamily="18" charset="0"/>
                         </a:rPr>
                         <a:t> курса</a:t>
                       </a:r>
@@ -3990,6 +4004,8 @@
                             <a:schemeClr val="tx1"/>
                           </a:solidFill>
                           <a:effectLst/>
+                          <a:latin typeface="+mn-lt"/>
+                          <a:cs typeface="Times New Roman" panose="02020603050405020304" pitchFamily="18" charset="0"/>
                         </a:rPr>
                         <a:t>гр. 2207д2</a:t>
                       </a:r>
@@ -3998,8 +4014,9 @@
                           <a:schemeClr val="tx1"/>
                         </a:solidFill>
                         <a:effectLst/>
-                        <a:latin typeface="Calibri" panose="020F0502020204030204" pitchFamily="34" charset="0"/>
+                        <a:latin typeface="+mn-lt"/>
                         <a:ea typeface="Calibri" panose="020F0502020204030204" pitchFamily="34" charset="0"/>
+                        <a:cs typeface="Times New Roman" panose="02020603050405020304" pitchFamily="18" charset="0"/>
                       </a:endParaRPr>
                     </a:p>
                   </a:txBody>
@@ -4021,6 +4038,8 @@
                             <a:schemeClr val="tx1"/>
                           </a:solidFill>
                           <a:effectLst/>
+                          <a:latin typeface="+mn-lt"/>
+                          <a:cs typeface="Times New Roman" panose="02020603050405020304" pitchFamily="18" charset="0"/>
                         </a:rPr>
                         <a:t>Бородина А.В.</a:t>
                       </a:r>
@@ -4077,6 +4096,7 @@
                   <a:schemeClr val="tx1"/>
                 </a:solidFill>
                 <a:effectLst/>
+                <a:cs typeface="Times New Roman" panose="02020603050405020304" pitchFamily="18" charset="0"/>
               </a:rPr>
               <a:t>Новосибирск</a:t>
             </a:r>
@@ -4086,8 +4106,9 @@
             <a:r>
               <a:rPr lang="ru-RU" sz="2000" dirty="0">
                 <a:ea typeface="Calibri" panose="020F0502020204030204" pitchFamily="34" charset="0"/>
+                <a:cs typeface="Times New Roman" panose="02020603050405020304" pitchFamily="18" charset="0"/>
               </a:rPr>
-              <a:t>2025</a:t>
+              <a:t>2026</a:t>
             </a:r>
             <a:endParaRPr lang="ru-RU" sz="2000" dirty="0">
               <a:solidFill>
@@ -4095,6 +4116,7 @@
               </a:solidFill>
               <a:effectLst/>
               <a:ea typeface="Calibri" panose="020F0502020204030204" pitchFamily="34" charset="0"/>
+              <a:cs typeface="Times New Roman" panose="02020603050405020304" pitchFamily="18" charset="0"/>
             </a:endParaRPr>
           </a:p>
         </p:txBody>
@@ -4120,7 +4142,7 @@
         <p:cNvPr id="1" name="">
           <a:extLst>
             <a:ext uri="{FF2B5EF4-FFF2-40B4-BE49-F238E27FC236}">
-              <a16:creationId xmlns:a16="http://schemas.microsoft.com/office/drawing/2014/main" id="{B8E8413C-0549-A625-79F0-C4F0080D2DFA}"/>
+              <a16:creationId xmlns:a16="http://schemas.microsoft.com/office/drawing/2014/main" id="{CE8DCC2E-C094-6225-8A4C-3843085BF5DA}"/>
             </a:ext>
           </a:extLst>
         </p:cNvPr>
@@ -4135,98 +4157,194 @@
           <a:chExt cx="0" cy="0"/>
         </a:xfrm>
       </p:grpSpPr>
-      <p:sp>
-        <p:nvSpPr>
-          <p:cNvPr id="2" name="Заголовок 1">
-            <a:extLst>
-              <a:ext uri="{FF2B5EF4-FFF2-40B4-BE49-F238E27FC236}">
-                <a16:creationId xmlns:a16="http://schemas.microsoft.com/office/drawing/2014/main" id="{86356E4F-BF31-4A6F-83D9-32AE73AEBDE2}"/>
-              </a:ext>
-            </a:extLst>
-          </p:cNvPr>
-          <p:cNvSpPr>
-            <a:spLocks noGrp="1"/>
-          </p:cNvSpPr>
-          <p:nvPr>
-            <p:ph type="title"/>
-          </p:nvPr>
-        </p:nvSpPr>
-        <p:spPr/>
-        <p:txBody>
-          <a:bodyPr/>
-          <a:lstStyle/>
-          <a:p>
-            <a:r>
-              <a:rPr lang="ru-RU" dirty="0"/>
-              <a:t>Макет веб-клиента</a:t>
-            </a:r>
-          </a:p>
-        </p:txBody>
-      </p:sp>
       <p:pic>
         <p:nvPicPr>
-          <p:cNvPr id="13" name="Рисунок 12">
-            <a:extLst>
-              <a:ext uri="{FF2B5EF4-FFF2-40B4-BE49-F238E27FC236}">
-                <a16:creationId xmlns:a16="http://schemas.microsoft.com/office/drawing/2014/main" id="{1B23A3A3-7AA6-8C84-3B4E-DAFFBC97ADB6}"/>
+          <p:cNvPr id="7170" name="Picture 2">
+            <a:extLst>
+              <a:ext uri="{FF2B5EF4-FFF2-40B4-BE49-F238E27FC236}">
+                <a16:creationId xmlns:a16="http://schemas.microsoft.com/office/drawing/2014/main" id="{B306B862-B540-2C59-EC13-31C1FCD8FCA1}"/>
               </a:ext>
             </a:extLst>
           </p:cNvPr>
           <p:cNvPicPr>
-            <a:picLocks noChangeAspect="1"/>
+            <a:picLocks noChangeAspect="1" noChangeArrowheads="1"/>
           </p:cNvPicPr>
           <p:nvPr/>
         </p:nvPicPr>
         <p:blipFill>
-          <a:blip r:embed="rId2"/>
+          <a:blip r:embed="rId2">
+            <a:extLst>
+              <a:ext uri="{28A0092B-C50C-407E-A947-70E740481C1C}">
+                <a14:useLocalDpi xmlns:a14="http://schemas.microsoft.com/office/drawing/2010/main" val="0"/>
+              </a:ext>
+            </a:extLst>
+          </a:blip>
+          <a:srcRect/>
           <a:stretch>
             <a:fillRect/>
           </a:stretch>
         </p:blipFill>
-        <p:spPr>
+        <p:spPr bwMode="auto">
           <a:xfrm>
-            <a:off x="4986708" y="1429265"/>
-            <a:ext cx="3880269" cy="5220392"/>
+            <a:off x="838200" y="1314335"/>
+            <a:ext cx="9840380" cy="4540925"/>
           </a:xfrm>
           <a:prstGeom prst="rect">
             <a:avLst/>
           </a:prstGeom>
+          <a:noFill/>
+          <a:extLst>
+            <a:ext uri="{909E8E84-426E-40DD-AFC4-6F175D3DCCD1}">
+              <a14:hiddenFill xmlns:a14="http://schemas.microsoft.com/office/drawing/2010/main">
+                <a:solidFill>
+                  <a:srgbClr val="FFFFFF"/>
+                </a:solidFill>
+              </a14:hiddenFill>
+            </a:ext>
+          </a:extLst>
         </p:spPr>
       </p:pic>
-      <p:pic>
-        <p:nvPicPr>
-          <p:cNvPr id="4" name="Рисунок 3">
-            <a:extLst>
-              <a:ext uri="{FF2B5EF4-FFF2-40B4-BE49-F238E27FC236}">
-                <a16:creationId xmlns:a16="http://schemas.microsoft.com/office/drawing/2014/main" id="{3FD3D2AD-75EA-1535-9E2B-8ADBB6F1F439}"/>
-              </a:ext>
-            </a:extLst>
-          </p:cNvPr>
-          <p:cNvPicPr>
-            <a:picLocks noChangeAspect="1"/>
-          </p:cNvPicPr>
-          <p:nvPr/>
-        </p:nvPicPr>
-        <p:blipFill>
-          <a:blip r:embed="rId3"/>
-          <a:stretch>
-            <a:fillRect/>
-          </a:stretch>
-        </p:blipFill>
+      <p:sp>
+        <p:nvSpPr>
+          <p:cNvPr id="2" name="Заголовок 1">
+            <a:extLst>
+              <a:ext uri="{FF2B5EF4-FFF2-40B4-BE49-F238E27FC236}">
+                <a16:creationId xmlns:a16="http://schemas.microsoft.com/office/drawing/2014/main" id="{18E88D18-3A2A-0F72-E776-B12DD11F4BD0}"/>
+              </a:ext>
+            </a:extLst>
+          </p:cNvPr>
+          <p:cNvSpPr>
+            <a:spLocks noGrp="1"/>
+          </p:cNvSpPr>
+          <p:nvPr>
+            <p:ph type="title"/>
+          </p:nvPr>
+        </p:nvSpPr>
         <p:spPr>
           <a:xfrm>
-            <a:off x="838200" y="1429265"/>
-            <a:ext cx="3851108" cy="5220392"/>
+            <a:off x="838200" y="0"/>
+            <a:ext cx="10515600" cy="1325563"/>
           </a:xfrm>
-          <a:prstGeom prst="rect">
-            <a:avLst/>
-          </a:prstGeom>
         </p:spPr>
-      </p:pic>
+        <p:txBody>
+          <a:bodyPr/>
+          <a:lstStyle/>
+          <a:p>
+            <a:r>
+              <a:rPr lang="ru-RU" b="1" dirty="0">
+                <a:latin typeface="+mn-lt"/>
+              </a:rPr>
+              <a:t>Интерфейс продукта</a:t>
+            </a:r>
+          </a:p>
+        </p:txBody>
+      </p:sp>
+      <p:sp>
+        <p:nvSpPr>
+          <p:cNvPr id="3" name="Номер слайда 2">
+            <a:extLst>
+              <a:ext uri="{FF2B5EF4-FFF2-40B4-BE49-F238E27FC236}">
+                <a16:creationId xmlns:a16="http://schemas.microsoft.com/office/drawing/2014/main" id="{2E84D0FD-854F-8EFB-F670-76F907CE2AC1}"/>
+              </a:ext>
+            </a:extLst>
+          </p:cNvPr>
+          <p:cNvSpPr>
+            <a:spLocks noGrp="1"/>
+          </p:cNvSpPr>
+          <p:nvPr>
+            <p:ph type="sldNum" sz="quarter" idx="12"/>
+          </p:nvPr>
+        </p:nvSpPr>
+        <p:spPr/>
+        <p:txBody>
+          <a:bodyPr/>
+          <a:lstStyle/>
+          <a:p>
+            <a:fld id="{C792C54E-EFF1-4B00-8652-01128ACE980F}" type="slidenum">
+              <a:rPr lang="ru-RU" smtClean="0"/>
+              <a:pPr/>
+              <a:t>10</a:t>
+            </a:fld>
+            <a:endParaRPr lang="ru-RU"/>
+          </a:p>
+        </p:txBody>
+      </p:sp>
+      <p:sp>
+        <p:nvSpPr>
+          <p:cNvPr id="4" name="Объект 6">
+            <a:extLst>
+              <a:ext uri="{FF2B5EF4-FFF2-40B4-BE49-F238E27FC236}">
+                <a16:creationId xmlns:a16="http://schemas.microsoft.com/office/drawing/2014/main" id="{BA899F52-370B-373B-EEE8-CA574ABF183A}"/>
+              </a:ext>
+            </a:extLst>
+          </p:cNvPr>
+          <p:cNvSpPr>
+            <a:spLocks noGrp="1"/>
+          </p:cNvSpPr>
+          <p:nvPr>
+            <p:ph idx="1"/>
+          </p:nvPr>
+        </p:nvSpPr>
+        <p:spPr>
+          <a:xfrm>
+            <a:off x="2412076" y="5955464"/>
+            <a:ext cx="7367848" cy="558510"/>
+          </a:xfrm>
+        </p:spPr>
+        <p:txBody>
+          <a:bodyPr>
+            <a:normAutofit fontScale="92500"/>
+          </a:bodyPr>
+          <a:lstStyle/>
+          <a:p>
+            <a:pPr marL="0" indent="0">
+              <a:buNone/>
+            </a:pPr>
+            <a:r>
+              <a:rPr lang="ru-RU" sz="2400" dirty="0">
+                <a:cs typeface="Times New Roman" panose="02020603050405020304" pitchFamily="18" charset="0"/>
+              </a:rPr>
+              <a:t>Страница </a:t>
+            </a:r>
+            <a:r>
+              <a:rPr lang="en-US" sz="2400" dirty="0">
+                <a:cs typeface="Times New Roman" panose="02020603050405020304" pitchFamily="18" charset="0"/>
+              </a:rPr>
+              <a:t>“</a:t>
+            </a:r>
+            <a:r>
+              <a:rPr lang="ru-RU" sz="2400" dirty="0">
+                <a:cs typeface="Times New Roman" panose="02020603050405020304" pitchFamily="18" charset="0"/>
+              </a:rPr>
+              <a:t>Управление образами</a:t>
+            </a:r>
+            <a:r>
+              <a:rPr lang="en-US" sz="2400" dirty="0">
+                <a:cs typeface="Times New Roman" panose="02020603050405020304" pitchFamily="18" charset="0"/>
+              </a:rPr>
+              <a:t>”</a:t>
+            </a:r>
+            <a:r>
+              <a:rPr lang="ru-RU" sz="2400" dirty="0">
+                <a:cs typeface="Times New Roman" panose="02020603050405020304" pitchFamily="18" charset="0"/>
+              </a:rPr>
+              <a:t>, окно создания образа</a:t>
+            </a:r>
+          </a:p>
+          <a:p>
+            <a:pPr marL="0" indent="0">
+              <a:buNone/>
+            </a:pPr>
+            <a:endParaRPr lang="ru-RU" sz="2400" dirty="0">
+              <a:cs typeface="Times New Roman" panose="02020603050405020304" pitchFamily="18" charset="0"/>
+            </a:endParaRPr>
+          </a:p>
+        </p:txBody>
+      </p:sp>
     </p:spTree>
     <p:extLst>
       <p:ext uri="{BB962C8B-B14F-4D97-AF65-F5344CB8AC3E}">
-        <p14:creationId xmlns:p14="http://schemas.microsoft.com/office/powerpoint/2010/main" val="665009656"/>
+        <p14:creationId xmlns:p14="http://schemas.microsoft.com/office/powerpoint/2010/main" val="3082499810"/>
       </p:ext>
     </p:extLst>
   </p:cSld>
@@ -4237,100 +4355,6 @@
 </file>
 
 <file path=ppt/slides/slide11.xml><?xml version="1.0" encoding="utf-8"?>
-<p:sld xmlns:a="http://schemas.openxmlformats.org/drawingml/2006/main" xmlns:r="http://schemas.openxmlformats.org/officeDocument/2006/relationships" xmlns:p="http://schemas.openxmlformats.org/presentationml/2006/main">
-  <p:cSld>
-    <p:spTree>
-      <p:nvGrpSpPr>
-        <p:cNvPr id="1" name="">
-          <a:extLst>
-            <a:ext uri="{FF2B5EF4-FFF2-40B4-BE49-F238E27FC236}">
-              <a16:creationId xmlns:a16="http://schemas.microsoft.com/office/drawing/2014/main" id="{75F0CD7B-613B-1CE3-D4E8-A5524958EF38}"/>
-            </a:ext>
-          </a:extLst>
-        </p:cNvPr>
-        <p:cNvGrpSpPr/>
-        <p:nvPr/>
-      </p:nvGrpSpPr>
-      <p:grpSpPr>
-        <a:xfrm>
-          <a:off x="0" y="0"/>
-          <a:ext cx="0" cy="0"/>
-          <a:chOff x="0" y="0"/>
-          <a:chExt cx="0" cy="0"/>
-        </a:xfrm>
-      </p:grpSpPr>
-      <p:sp>
-        <p:nvSpPr>
-          <p:cNvPr id="2" name="Заголовок 1">
-            <a:extLst>
-              <a:ext uri="{FF2B5EF4-FFF2-40B4-BE49-F238E27FC236}">
-                <a16:creationId xmlns:a16="http://schemas.microsoft.com/office/drawing/2014/main" id="{838FE07E-F65E-5FF2-A97E-65A706AA7DA4}"/>
-              </a:ext>
-            </a:extLst>
-          </p:cNvPr>
-          <p:cNvSpPr>
-            <a:spLocks noGrp="1"/>
-          </p:cNvSpPr>
-          <p:nvPr>
-            <p:ph type="title"/>
-          </p:nvPr>
-        </p:nvSpPr>
-        <p:spPr/>
-        <p:txBody>
-          <a:bodyPr/>
-          <a:lstStyle/>
-          <a:p>
-            <a:r>
-              <a:rPr lang="ru-RU" dirty="0"/>
-              <a:t>Макет веб-клиента</a:t>
-            </a:r>
-          </a:p>
-        </p:txBody>
-      </p:sp>
-      <p:pic>
-        <p:nvPicPr>
-          <p:cNvPr id="15" name="Рисунок 14">
-            <a:extLst>
-              <a:ext uri="{FF2B5EF4-FFF2-40B4-BE49-F238E27FC236}">
-                <a16:creationId xmlns:a16="http://schemas.microsoft.com/office/drawing/2014/main" id="{67FDEC0E-37AD-22EB-1DD3-315926863FD5}"/>
-              </a:ext>
-            </a:extLst>
-          </p:cNvPr>
-          <p:cNvPicPr>
-            <a:picLocks noChangeAspect="1"/>
-          </p:cNvPicPr>
-          <p:nvPr/>
-        </p:nvPicPr>
-        <p:blipFill>
-          <a:blip r:embed="rId2"/>
-          <a:stretch>
-            <a:fillRect/>
-          </a:stretch>
-        </p:blipFill>
-        <p:spPr>
-          <a:xfrm>
-            <a:off x="951919" y="1558840"/>
-            <a:ext cx="6618920" cy="4945170"/>
-          </a:xfrm>
-          <a:prstGeom prst="rect">
-            <a:avLst/>
-          </a:prstGeom>
-        </p:spPr>
-      </p:pic>
-    </p:spTree>
-    <p:extLst>
-      <p:ext uri="{BB962C8B-B14F-4D97-AF65-F5344CB8AC3E}">
-        <p14:creationId xmlns:p14="http://schemas.microsoft.com/office/powerpoint/2010/main" val="1152497204"/>
-      </p:ext>
-    </p:extLst>
-  </p:cSld>
-  <p:clrMapOvr>
-    <a:masterClrMapping/>
-  </p:clrMapOvr>
-</p:sld>
-</file>
-
-<file path=ppt/slides/slide12.xml><?xml version="1.0" encoding="utf-8"?>
 <p:sld xmlns:a="http://schemas.openxmlformats.org/drawingml/2006/main" xmlns:r="http://schemas.openxmlformats.org/officeDocument/2006/relationships" xmlns:p="http://schemas.openxmlformats.org/presentationml/2006/main">
   <p:cSld>
     <p:spTree>
@@ -4349,51 +4373,912 @@
       </p:grpSpPr>
       <p:sp>
         <p:nvSpPr>
-          <p:cNvPr id="2" name="Заголовок 1">
-            <a:extLst>
-              <a:ext uri="{FF2B5EF4-FFF2-40B4-BE49-F238E27FC236}">
-                <a16:creationId xmlns:a16="http://schemas.microsoft.com/office/drawing/2014/main" id="{DD01C50A-C6E6-44F5-AF9B-2730E5C2088D}"/>
-              </a:ext>
-            </a:extLst>
-          </p:cNvPr>
+          <p:cNvPr id="2" name="Заголовок 1"/>
           <p:cNvSpPr>
             <a:spLocks noGrp="1"/>
           </p:cNvSpPr>
           <p:nvPr>
             <p:ph type="title"/>
-          </p:nvPr>
-        </p:nvSpPr>
-        <p:spPr/>
-        <p:txBody>
-          <a:bodyPr/>
-          <a:lstStyle/>
-          <a:p>
-            <a:r>
-              <a:rPr lang="ru-RU" b="1" dirty="0"/>
-              <a:t>Заключение</a:t>
-            </a:r>
-          </a:p>
-        </p:txBody>
-      </p:sp>
-      <p:sp>
-        <p:nvSpPr>
-          <p:cNvPr id="3" name="Объект 2">
-            <a:extLst>
-              <a:ext uri="{FF2B5EF4-FFF2-40B4-BE49-F238E27FC236}">
-                <a16:creationId xmlns:a16="http://schemas.microsoft.com/office/drawing/2014/main" id="{EAD7845B-26BC-4B97-B7FD-7A49131438E8}"/>
-              </a:ext>
-            </a:extLst>
-          </p:cNvPr>
-          <p:cNvSpPr>
-            <a:spLocks noGrp="1"/>
-          </p:cNvSpPr>
-          <p:nvPr>
-            <p:ph idx="1"/>
           </p:nvPr>
         </p:nvSpPr>
         <p:spPr>
           <a:xfrm>
-            <a:off x="838200" y="1592542"/>
+            <a:off x="838200" y="0"/>
+            <a:ext cx="10515600" cy="1325563"/>
+          </a:xfrm>
+        </p:spPr>
+        <p:txBody>
+          <a:bodyPr/>
+          <a:lstStyle/>
+          <a:p>
+            <a:r>
+              <a:rPr lang="ru-RU" b="1" dirty="0">
+                <a:latin typeface="+mn-lt"/>
+              </a:rPr>
+              <a:t>Интерфейс продукта</a:t>
+            </a:r>
+          </a:p>
+        </p:txBody>
+      </p:sp>
+      <p:sp>
+        <p:nvSpPr>
+          <p:cNvPr id="3" name="Номер слайда 2">
+            <a:extLst>
+              <a:ext uri="{FF2B5EF4-FFF2-40B4-BE49-F238E27FC236}">
+                <a16:creationId xmlns:a16="http://schemas.microsoft.com/office/drawing/2014/main" id="{4AADD676-E5FE-EB54-D2CE-4CB6EA578A1D}"/>
+              </a:ext>
+            </a:extLst>
+          </p:cNvPr>
+          <p:cNvSpPr>
+            <a:spLocks noGrp="1"/>
+          </p:cNvSpPr>
+          <p:nvPr>
+            <p:ph type="sldNum" sz="quarter" idx="12"/>
+          </p:nvPr>
+        </p:nvSpPr>
+        <p:spPr/>
+        <p:txBody>
+          <a:bodyPr/>
+          <a:lstStyle/>
+          <a:p>
+            <a:fld id="{C792C54E-EFF1-4B00-8652-01128ACE980F}" type="slidenum">
+              <a:rPr lang="ru-RU" smtClean="0"/>
+              <a:pPr/>
+              <a:t>11</a:t>
+            </a:fld>
+            <a:endParaRPr lang="ru-RU"/>
+          </a:p>
+        </p:txBody>
+      </p:sp>
+      <p:pic>
+        <p:nvPicPr>
+          <p:cNvPr id="1026" name="Picture 2">
+            <a:extLst>
+              <a:ext uri="{FF2B5EF4-FFF2-40B4-BE49-F238E27FC236}">
+                <a16:creationId xmlns:a16="http://schemas.microsoft.com/office/drawing/2014/main" id="{B218C07E-6DD1-E99D-626B-BFE4A55B5D52}"/>
+              </a:ext>
+            </a:extLst>
+          </p:cNvPr>
+          <p:cNvPicPr>
+            <a:picLocks noChangeAspect="1" noChangeArrowheads="1"/>
+          </p:cNvPicPr>
+          <p:nvPr/>
+        </p:nvPicPr>
+        <p:blipFill rotWithShape="1">
+          <a:blip r:embed="rId2">
+            <a:extLst>
+              <a:ext uri="{28A0092B-C50C-407E-A947-70E740481C1C}">
+                <a14:useLocalDpi xmlns:a14="http://schemas.microsoft.com/office/drawing/2010/main" val="0"/>
+              </a:ext>
+            </a:extLst>
+          </a:blip>
+          <a:srcRect l="1" t="1778" r="492"/>
+          <a:stretch>
+            <a:fillRect/>
+          </a:stretch>
+        </p:blipFill>
+        <p:spPr bwMode="auto">
+          <a:xfrm>
+            <a:off x="838200" y="1325563"/>
+            <a:ext cx="10063455" cy="4555375"/>
+          </a:xfrm>
+          <a:prstGeom prst="rect">
+            <a:avLst/>
+          </a:prstGeom>
+          <a:noFill/>
+          <a:extLst>
+            <a:ext uri="{909E8E84-426E-40DD-AFC4-6F175D3DCCD1}">
+              <a14:hiddenFill xmlns:a14="http://schemas.microsoft.com/office/drawing/2010/main">
+                <a:solidFill>
+                  <a:srgbClr val="FFFFFF"/>
+                </a:solidFill>
+              </a14:hiddenFill>
+            </a:ext>
+          </a:extLst>
+        </p:spPr>
+      </p:pic>
+      <p:sp>
+        <p:nvSpPr>
+          <p:cNvPr id="4" name="Объект 6">
+            <a:extLst>
+              <a:ext uri="{FF2B5EF4-FFF2-40B4-BE49-F238E27FC236}">
+                <a16:creationId xmlns:a16="http://schemas.microsoft.com/office/drawing/2014/main" id="{DF5BD25B-4FE4-2379-8B0B-F0542928B766}"/>
+              </a:ext>
+            </a:extLst>
+          </p:cNvPr>
+          <p:cNvSpPr>
+            <a:spLocks noGrp="1"/>
+          </p:cNvSpPr>
+          <p:nvPr>
+            <p:ph idx="1"/>
+          </p:nvPr>
+        </p:nvSpPr>
+        <p:spPr>
+          <a:xfrm>
+            <a:off x="3846022" y="5892166"/>
+            <a:ext cx="4764578" cy="391402"/>
+          </a:xfrm>
+        </p:spPr>
+        <p:txBody>
+          <a:bodyPr>
+            <a:normAutofit lnSpcReduction="10000"/>
+          </a:bodyPr>
+          <a:lstStyle/>
+          <a:p>
+            <a:pPr marL="0" indent="0">
+              <a:buNone/>
+            </a:pPr>
+            <a:r>
+              <a:rPr lang="ru-RU" sz="2400" dirty="0">
+                <a:cs typeface="Times New Roman" panose="02020603050405020304" pitchFamily="18" charset="0"/>
+              </a:rPr>
+              <a:t>Страница </a:t>
+            </a:r>
+            <a:r>
+              <a:rPr lang="en-US" sz="2400" dirty="0">
+                <a:cs typeface="Times New Roman" panose="02020603050405020304" pitchFamily="18" charset="0"/>
+              </a:rPr>
+              <a:t>“</a:t>
+            </a:r>
+            <a:r>
+              <a:rPr lang="ru-RU" sz="2400" dirty="0">
+                <a:cs typeface="Times New Roman" panose="02020603050405020304" pitchFamily="18" charset="0"/>
+              </a:rPr>
+              <a:t>Управление клонами</a:t>
+            </a:r>
+            <a:r>
+              <a:rPr lang="en-US" sz="2400" dirty="0">
+                <a:cs typeface="Times New Roman" panose="02020603050405020304" pitchFamily="18" charset="0"/>
+              </a:rPr>
+              <a:t>”</a:t>
+            </a:r>
+            <a:endParaRPr lang="ru-RU" sz="2400" dirty="0">
+              <a:cs typeface="Times New Roman" panose="02020603050405020304" pitchFamily="18" charset="0"/>
+            </a:endParaRPr>
+          </a:p>
+          <a:p>
+            <a:pPr marL="0" indent="0">
+              <a:buNone/>
+            </a:pPr>
+            <a:endParaRPr lang="ru-RU" sz="2400" dirty="0">
+              <a:cs typeface="Times New Roman" panose="02020603050405020304" pitchFamily="18" charset="0"/>
+            </a:endParaRPr>
+          </a:p>
+        </p:txBody>
+      </p:sp>
+    </p:spTree>
+  </p:cSld>
+  <p:clrMapOvr>
+    <a:masterClrMapping/>
+  </p:clrMapOvr>
+</p:sld>
+</file>
+
+<file path=ppt/slides/slide12.xml><?xml version="1.0" encoding="utf-8"?>
+<p:sld xmlns:a="http://schemas.openxmlformats.org/drawingml/2006/main" xmlns:r="http://schemas.openxmlformats.org/officeDocument/2006/relationships" xmlns:p="http://schemas.openxmlformats.org/presentationml/2006/main">
+  <p:cSld>
+    <p:spTree>
+      <p:nvGrpSpPr>
+        <p:cNvPr id="1" name="">
+          <a:extLst>
+            <a:ext uri="{FF2B5EF4-FFF2-40B4-BE49-F238E27FC236}">
+              <a16:creationId xmlns:a16="http://schemas.microsoft.com/office/drawing/2014/main" id="{49E8AFD2-BE57-51C5-78D2-F38CBF014133}"/>
+            </a:ext>
+          </a:extLst>
+        </p:cNvPr>
+        <p:cNvGrpSpPr/>
+        <p:nvPr/>
+      </p:nvGrpSpPr>
+      <p:grpSpPr>
+        <a:xfrm>
+          <a:off x="0" y="0"/>
+          <a:ext cx="0" cy="0"/>
+          <a:chOff x="0" y="0"/>
+          <a:chExt cx="0" cy="0"/>
+        </a:xfrm>
+      </p:grpSpPr>
+      <p:pic>
+        <p:nvPicPr>
+          <p:cNvPr id="7172" name="Picture 4">
+            <a:extLst>
+              <a:ext uri="{FF2B5EF4-FFF2-40B4-BE49-F238E27FC236}">
+                <a16:creationId xmlns:a16="http://schemas.microsoft.com/office/drawing/2014/main" id="{8861A417-EDA8-CE6C-5501-C33C029097DC}"/>
+              </a:ext>
+            </a:extLst>
+          </p:cNvPr>
+          <p:cNvPicPr>
+            <a:picLocks noChangeAspect="1" noChangeArrowheads="1"/>
+          </p:cNvPicPr>
+          <p:nvPr/>
+        </p:nvPicPr>
+        <p:blipFill>
+          <a:blip r:embed="rId2">
+            <a:extLst>
+              <a:ext uri="{28A0092B-C50C-407E-A947-70E740481C1C}">
+                <a14:useLocalDpi xmlns:a14="http://schemas.microsoft.com/office/drawing/2010/main" val="0"/>
+              </a:ext>
+            </a:extLst>
+          </a:blip>
+          <a:srcRect/>
+          <a:stretch>
+            <a:fillRect/>
+          </a:stretch>
+        </p:blipFill>
+        <p:spPr bwMode="auto">
+          <a:xfrm>
+            <a:off x="838200" y="1314334"/>
+            <a:ext cx="9812691" cy="4540925"/>
+          </a:xfrm>
+          <a:prstGeom prst="rect">
+            <a:avLst/>
+          </a:prstGeom>
+          <a:noFill/>
+          <a:extLst>
+            <a:ext uri="{909E8E84-426E-40DD-AFC4-6F175D3DCCD1}">
+              <a14:hiddenFill xmlns:a14="http://schemas.microsoft.com/office/drawing/2010/main">
+                <a:solidFill>
+                  <a:srgbClr val="FFFFFF"/>
+                </a:solidFill>
+              </a14:hiddenFill>
+            </a:ext>
+          </a:extLst>
+        </p:spPr>
+      </p:pic>
+      <p:sp>
+        <p:nvSpPr>
+          <p:cNvPr id="2" name="Заголовок 1">
+            <a:extLst>
+              <a:ext uri="{FF2B5EF4-FFF2-40B4-BE49-F238E27FC236}">
+                <a16:creationId xmlns:a16="http://schemas.microsoft.com/office/drawing/2014/main" id="{146A6C04-60E0-8F1B-B2E2-BF543EAC0BD4}"/>
+              </a:ext>
+            </a:extLst>
+          </p:cNvPr>
+          <p:cNvSpPr>
+            <a:spLocks noGrp="1"/>
+          </p:cNvSpPr>
+          <p:nvPr>
+            <p:ph type="title"/>
+          </p:nvPr>
+        </p:nvSpPr>
+        <p:spPr>
+          <a:xfrm>
+            <a:off x="838200" y="0"/>
+            <a:ext cx="10515600" cy="1325563"/>
+          </a:xfrm>
+        </p:spPr>
+        <p:txBody>
+          <a:bodyPr/>
+          <a:lstStyle/>
+          <a:p>
+            <a:r>
+              <a:rPr lang="ru-RU" b="1" dirty="0">
+                <a:latin typeface="+mn-lt"/>
+              </a:rPr>
+              <a:t>Интерфейс продукта</a:t>
+            </a:r>
+          </a:p>
+        </p:txBody>
+      </p:sp>
+      <p:sp>
+        <p:nvSpPr>
+          <p:cNvPr id="3" name="Номер слайда 2">
+            <a:extLst>
+              <a:ext uri="{FF2B5EF4-FFF2-40B4-BE49-F238E27FC236}">
+                <a16:creationId xmlns:a16="http://schemas.microsoft.com/office/drawing/2014/main" id="{A91C5A47-5E91-A351-B430-CEC1DC470F2B}"/>
+              </a:ext>
+            </a:extLst>
+          </p:cNvPr>
+          <p:cNvSpPr>
+            <a:spLocks noGrp="1"/>
+          </p:cNvSpPr>
+          <p:nvPr>
+            <p:ph type="sldNum" sz="quarter" idx="12"/>
+          </p:nvPr>
+        </p:nvSpPr>
+        <p:spPr/>
+        <p:txBody>
+          <a:bodyPr/>
+          <a:lstStyle/>
+          <a:p>
+            <a:fld id="{C792C54E-EFF1-4B00-8652-01128ACE980F}" type="slidenum">
+              <a:rPr lang="ru-RU" smtClean="0"/>
+              <a:pPr/>
+              <a:t>12</a:t>
+            </a:fld>
+            <a:endParaRPr lang="ru-RU"/>
+          </a:p>
+        </p:txBody>
+      </p:sp>
+      <p:sp>
+        <p:nvSpPr>
+          <p:cNvPr id="4" name="Объект 6">
+            <a:extLst>
+              <a:ext uri="{FF2B5EF4-FFF2-40B4-BE49-F238E27FC236}">
+                <a16:creationId xmlns:a16="http://schemas.microsoft.com/office/drawing/2014/main" id="{2B1A34DB-2062-1014-1D0E-AFB8471D9F52}"/>
+              </a:ext>
+            </a:extLst>
+          </p:cNvPr>
+          <p:cNvSpPr>
+            <a:spLocks noGrp="1"/>
+          </p:cNvSpPr>
+          <p:nvPr>
+            <p:ph idx="1"/>
+          </p:nvPr>
+        </p:nvSpPr>
+        <p:spPr>
+          <a:xfrm>
+            <a:off x="2412076" y="5955464"/>
+            <a:ext cx="7367848" cy="558510"/>
+          </a:xfrm>
+        </p:spPr>
+        <p:txBody>
+          <a:bodyPr>
+            <a:normAutofit/>
+          </a:bodyPr>
+          <a:lstStyle/>
+          <a:p>
+            <a:pPr marL="0" indent="0">
+              <a:buNone/>
+            </a:pPr>
+            <a:r>
+              <a:rPr lang="ru-RU" sz="2400" dirty="0">
+                <a:cs typeface="Times New Roman" panose="02020603050405020304" pitchFamily="18" charset="0"/>
+              </a:rPr>
+              <a:t>Страница </a:t>
+            </a:r>
+            <a:r>
+              <a:rPr lang="en-US" sz="2400" dirty="0">
+                <a:cs typeface="Times New Roman" panose="02020603050405020304" pitchFamily="18" charset="0"/>
+              </a:rPr>
+              <a:t>“</a:t>
+            </a:r>
+            <a:r>
+              <a:rPr lang="ru-RU" sz="2400" dirty="0">
+                <a:cs typeface="Times New Roman" panose="02020603050405020304" pitchFamily="18" charset="0"/>
+              </a:rPr>
+              <a:t>Управление клонами</a:t>
+            </a:r>
+            <a:r>
+              <a:rPr lang="en-US" sz="2400" dirty="0">
+                <a:cs typeface="Times New Roman" panose="02020603050405020304" pitchFamily="18" charset="0"/>
+              </a:rPr>
+              <a:t>”</a:t>
+            </a:r>
+            <a:r>
+              <a:rPr lang="ru-RU" sz="2400" dirty="0">
+                <a:cs typeface="Times New Roman" panose="02020603050405020304" pitchFamily="18" charset="0"/>
+              </a:rPr>
+              <a:t>, окно создания клона</a:t>
+            </a:r>
+          </a:p>
+          <a:p>
+            <a:pPr marL="0" indent="0">
+              <a:buNone/>
+            </a:pPr>
+            <a:endParaRPr lang="ru-RU" sz="2400" dirty="0">
+              <a:cs typeface="Times New Roman" panose="02020603050405020304" pitchFamily="18" charset="0"/>
+            </a:endParaRPr>
+          </a:p>
+        </p:txBody>
+      </p:sp>
+    </p:spTree>
+    <p:extLst>
+      <p:ext uri="{BB962C8B-B14F-4D97-AF65-F5344CB8AC3E}">
+        <p14:creationId xmlns:p14="http://schemas.microsoft.com/office/powerpoint/2010/main" val="598335723"/>
+      </p:ext>
+    </p:extLst>
+  </p:cSld>
+  <p:clrMapOvr>
+    <a:masterClrMapping/>
+  </p:clrMapOvr>
+</p:sld>
+</file>
+
+<file path=ppt/slides/slide13.xml><?xml version="1.0" encoding="utf-8"?>
+<p:sld xmlns:a="http://schemas.openxmlformats.org/drawingml/2006/main" xmlns:r="http://schemas.openxmlformats.org/officeDocument/2006/relationships" xmlns:p="http://schemas.openxmlformats.org/presentationml/2006/main">
+  <p:cSld>
+    <p:spTree>
+      <p:nvGrpSpPr>
+        <p:cNvPr id="1" name="">
+          <a:extLst>
+            <a:ext uri="{FF2B5EF4-FFF2-40B4-BE49-F238E27FC236}">
+              <a16:creationId xmlns:a16="http://schemas.microsoft.com/office/drawing/2014/main" id="{DB3483B1-6845-5896-B989-92013FD88BAC}"/>
+            </a:ext>
+          </a:extLst>
+        </p:cNvPr>
+        <p:cNvGrpSpPr/>
+        <p:nvPr/>
+      </p:nvGrpSpPr>
+      <p:grpSpPr>
+        <a:xfrm>
+          <a:off x="0" y="0"/>
+          <a:ext cx="0" cy="0"/>
+          <a:chOff x="0" y="0"/>
+          <a:chExt cx="0" cy="0"/>
+        </a:xfrm>
+      </p:grpSpPr>
+      <p:pic>
+        <p:nvPicPr>
+          <p:cNvPr id="5124" name="Picture 4">
+            <a:extLst>
+              <a:ext uri="{FF2B5EF4-FFF2-40B4-BE49-F238E27FC236}">
+                <a16:creationId xmlns:a16="http://schemas.microsoft.com/office/drawing/2014/main" id="{1155A68F-C644-3524-AF93-9D42169CDEEF}"/>
+              </a:ext>
+            </a:extLst>
+          </p:cNvPr>
+          <p:cNvPicPr>
+            <a:picLocks noChangeAspect="1" noChangeArrowheads="1"/>
+          </p:cNvPicPr>
+          <p:nvPr/>
+        </p:nvPicPr>
+        <p:blipFill>
+          <a:blip r:embed="rId2">
+            <a:extLst>
+              <a:ext uri="{28A0092B-C50C-407E-A947-70E740481C1C}">
+                <a14:useLocalDpi xmlns:a14="http://schemas.microsoft.com/office/drawing/2010/main" val="0"/>
+              </a:ext>
+            </a:extLst>
+          </a:blip>
+          <a:srcRect/>
+          <a:stretch>
+            <a:fillRect/>
+          </a:stretch>
+        </p:blipFill>
+        <p:spPr bwMode="auto">
+          <a:xfrm>
+            <a:off x="838200" y="1314335"/>
+            <a:ext cx="9840380" cy="4505049"/>
+          </a:xfrm>
+          <a:prstGeom prst="rect">
+            <a:avLst/>
+          </a:prstGeom>
+          <a:noFill/>
+          <a:extLst>
+            <a:ext uri="{909E8E84-426E-40DD-AFC4-6F175D3DCCD1}">
+              <a14:hiddenFill xmlns:a14="http://schemas.microsoft.com/office/drawing/2010/main">
+                <a:solidFill>
+                  <a:srgbClr val="FFFFFF"/>
+                </a:solidFill>
+              </a14:hiddenFill>
+            </a:ext>
+          </a:extLst>
+        </p:spPr>
+      </p:pic>
+      <p:sp>
+        <p:nvSpPr>
+          <p:cNvPr id="2" name="Заголовок 1">
+            <a:extLst>
+              <a:ext uri="{FF2B5EF4-FFF2-40B4-BE49-F238E27FC236}">
+                <a16:creationId xmlns:a16="http://schemas.microsoft.com/office/drawing/2014/main" id="{D6130AA8-0B48-FAEB-2D75-2601BA95DEEC}"/>
+              </a:ext>
+            </a:extLst>
+          </p:cNvPr>
+          <p:cNvSpPr>
+            <a:spLocks noGrp="1"/>
+          </p:cNvSpPr>
+          <p:nvPr>
+            <p:ph type="title"/>
+          </p:nvPr>
+        </p:nvSpPr>
+        <p:spPr>
+          <a:xfrm>
+            <a:off x="838200" y="0"/>
+            <a:ext cx="10515600" cy="1325563"/>
+          </a:xfrm>
+        </p:spPr>
+        <p:txBody>
+          <a:bodyPr/>
+          <a:lstStyle/>
+          <a:p>
+            <a:r>
+              <a:rPr lang="ru-RU" b="1" dirty="0">
+                <a:latin typeface="+mn-lt"/>
+              </a:rPr>
+              <a:t>Интерфейс продукта</a:t>
+            </a:r>
+          </a:p>
+        </p:txBody>
+      </p:sp>
+      <p:sp>
+        <p:nvSpPr>
+          <p:cNvPr id="3" name="Номер слайда 2">
+            <a:extLst>
+              <a:ext uri="{FF2B5EF4-FFF2-40B4-BE49-F238E27FC236}">
+                <a16:creationId xmlns:a16="http://schemas.microsoft.com/office/drawing/2014/main" id="{6337F5E4-A0AB-8A47-3CE7-A6FC80B983C7}"/>
+              </a:ext>
+            </a:extLst>
+          </p:cNvPr>
+          <p:cNvSpPr>
+            <a:spLocks noGrp="1"/>
+          </p:cNvSpPr>
+          <p:nvPr>
+            <p:ph type="sldNum" sz="quarter" idx="12"/>
+          </p:nvPr>
+        </p:nvSpPr>
+        <p:spPr/>
+        <p:txBody>
+          <a:bodyPr/>
+          <a:lstStyle/>
+          <a:p>
+            <a:fld id="{C792C54E-EFF1-4B00-8652-01128ACE980F}" type="slidenum">
+              <a:rPr lang="ru-RU" smtClean="0"/>
+              <a:pPr/>
+              <a:t>13</a:t>
+            </a:fld>
+            <a:endParaRPr lang="ru-RU"/>
+          </a:p>
+        </p:txBody>
+      </p:sp>
+      <p:sp>
+        <p:nvSpPr>
+          <p:cNvPr id="4" name="Объект 6">
+            <a:extLst>
+              <a:ext uri="{FF2B5EF4-FFF2-40B4-BE49-F238E27FC236}">
+                <a16:creationId xmlns:a16="http://schemas.microsoft.com/office/drawing/2014/main" id="{731C0555-1B39-619C-7FCE-6D52D67BCD7E}"/>
+              </a:ext>
+            </a:extLst>
+          </p:cNvPr>
+          <p:cNvSpPr>
+            <a:spLocks noGrp="1"/>
+          </p:cNvSpPr>
+          <p:nvPr>
+            <p:ph idx="1"/>
+          </p:nvPr>
+        </p:nvSpPr>
+        <p:spPr>
+          <a:xfrm>
+            <a:off x="3846022" y="5892166"/>
+            <a:ext cx="4764578" cy="391402"/>
+          </a:xfrm>
+        </p:spPr>
+        <p:txBody>
+          <a:bodyPr>
+            <a:normAutofit lnSpcReduction="10000"/>
+          </a:bodyPr>
+          <a:lstStyle/>
+          <a:p>
+            <a:pPr marL="0" indent="0">
+              <a:buNone/>
+            </a:pPr>
+            <a:r>
+              <a:rPr lang="ru-RU" sz="2400" dirty="0">
+                <a:cs typeface="Times New Roman" panose="02020603050405020304" pitchFamily="18" charset="0"/>
+              </a:rPr>
+              <a:t>Страница </a:t>
+            </a:r>
+            <a:r>
+              <a:rPr lang="en-US" sz="2400" dirty="0">
+                <a:cs typeface="Times New Roman" panose="02020603050405020304" pitchFamily="18" charset="0"/>
+              </a:rPr>
+              <a:t>“</a:t>
+            </a:r>
+            <a:r>
+              <a:rPr lang="ru-RU" sz="2400" dirty="0">
+                <a:cs typeface="Times New Roman" panose="02020603050405020304" pitchFamily="18" charset="0"/>
+              </a:rPr>
+              <a:t>Мониторинг</a:t>
+            </a:r>
+            <a:r>
+              <a:rPr lang="en-US" sz="2400" dirty="0">
+                <a:cs typeface="Times New Roman" panose="02020603050405020304" pitchFamily="18" charset="0"/>
+              </a:rPr>
+              <a:t>”</a:t>
+            </a:r>
+            <a:endParaRPr lang="ru-RU" sz="2400" dirty="0">
+              <a:cs typeface="Times New Roman" panose="02020603050405020304" pitchFamily="18" charset="0"/>
+            </a:endParaRPr>
+          </a:p>
+          <a:p>
+            <a:pPr marL="0" indent="0">
+              <a:buNone/>
+            </a:pPr>
+            <a:endParaRPr lang="ru-RU" sz="2400" dirty="0">
+              <a:cs typeface="Times New Roman" panose="02020603050405020304" pitchFamily="18" charset="0"/>
+            </a:endParaRPr>
+          </a:p>
+        </p:txBody>
+      </p:sp>
+    </p:spTree>
+    <p:extLst>
+      <p:ext uri="{BB962C8B-B14F-4D97-AF65-F5344CB8AC3E}">
+        <p14:creationId xmlns:p14="http://schemas.microsoft.com/office/powerpoint/2010/main" val="3566628589"/>
+      </p:ext>
+    </p:extLst>
+  </p:cSld>
+  <p:clrMapOvr>
+    <a:masterClrMapping/>
+  </p:clrMapOvr>
+</p:sld>
+</file>
+
+<file path=ppt/slides/slide14.xml><?xml version="1.0" encoding="utf-8"?>
+<p:sld xmlns:a="http://schemas.openxmlformats.org/drawingml/2006/main" xmlns:r="http://schemas.openxmlformats.org/officeDocument/2006/relationships" xmlns:p="http://schemas.openxmlformats.org/presentationml/2006/main">
+  <p:cSld>
+    <p:spTree>
+      <p:nvGrpSpPr>
+        <p:cNvPr id="1" name="">
+          <a:extLst>
+            <a:ext uri="{FF2B5EF4-FFF2-40B4-BE49-F238E27FC236}">
+              <a16:creationId xmlns:a16="http://schemas.microsoft.com/office/drawing/2014/main" id="{4C6DDA3E-1196-0231-A35A-F9405FE0179E}"/>
+            </a:ext>
+          </a:extLst>
+        </p:cNvPr>
+        <p:cNvGrpSpPr/>
+        <p:nvPr/>
+      </p:nvGrpSpPr>
+      <p:grpSpPr>
+        <a:xfrm>
+          <a:off x="0" y="0"/>
+          <a:ext cx="0" cy="0"/>
+          <a:chOff x="0" y="0"/>
+          <a:chExt cx="0" cy="0"/>
+        </a:xfrm>
+      </p:grpSpPr>
+      <p:pic>
+        <p:nvPicPr>
+          <p:cNvPr id="5124" name="Picture 4">
+            <a:extLst>
+              <a:ext uri="{FF2B5EF4-FFF2-40B4-BE49-F238E27FC236}">
+                <a16:creationId xmlns:a16="http://schemas.microsoft.com/office/drawing/2014/main" id="{7E9213FE-D586-4D83-B3BF-8993F7EFE48E}"/>
+              </a:ext>
+            </a:extLst>
+          </p:cNvPr>
+          <p:cNvPicPr>
+            <a:picLocks noChangeAspect="1" noChangeArrowheads="1"/>
+          </p:cNvPicPr>
+          <p:nvPr/>
+        </p:nvPicPr>
+        <p:blipFill>
+          <a:blip r:embed="rId2">
+            <a:extLst>
+              <a:ext uri="{28A0092B-C50C-407E-A947-70E740481C1C}">
+                <a14:useLocalDpi xmlns:a14="http://schemas.microsoft.com/office/drawing/2010/main" val="0"/>
+              </a:ext>
+            </a:extLst>
+          </a:blip>
+          <a:srcRect/>
+          <a:stretch>
+            <a:fillRect/>
+          </a:stretch>
+        </p:blipFill>
+        <p:spPr bwMode="auto">
+          <a:xfrm>
+            <a:off x="838200" y="1314335"/>
+            <a:ext cx="9840380" cy="4505049"/>
+          </a:xfrm>
+          <a:prstGeom prst="rect">
+            <a:avLst/>
+          </a:prstGeom>
+          <a:noFill/>
+          <a:extLst>
+            <a:ext uri="{909E8E84-426E-40DD-AFC4-6F175D3DCCD1}">
+              <a14:hiddenFill xmlns:a14="http://schemas.microsoft.com/office/drawing/2010/main">
+                <a:solidFill>
+                  <a:srgbClr val="FFFFFF"/>
+                </a:solidFill>
+              </a14:hiddenFill>
+            </a:ext>
+          </a:extLst>
+        </p:spPr>
+      </p:pic>
+      <p:sp>
+        <p:nvSpPr>
+          <p:cNvPr id="2" name="Заголовок 1">
+            <a:extLst>
+              <a:ext uri="{FF2B5EF4-FFF2-40B4-BE49-F238E27FC236}">
+                <a16:creationId xmlns:a16="http://schemas.microsoft.com/office/drawing/2014/main" id="{89BB1FEA-758D-959A-35F0-627188BD7566}"/>
+              </a:ext>
+            </a:extLst>
+          </p:cNvPr>
+          <p:cNvSpPr>
+            <a:spLocks noGrp="1"/>
+          </p:cNvSpPr>
+          <p:nvPr>
+            <p:ph type="title"/>
+          </p:nvPr>
+        </p:nvSpPr>
+        <p:spPr>
+          <a:xfrm>
+            <a:off x="838200" y="0"/>
+            <a:ext cx="10515600" cy="1325563"/>
+          </a:xfrm>
+        </p:spPr>
+        <p:txBody>
+          <a:bodyPr/>
+          <a:lstStyle/>
+          <a:p>
+            <a:r>
+              <a:rPr lang="ru-RU" b="1" dirty="0">
+                <a:latin typeface="+mn-lt"/>
+              </a:rPr>
+              <a:t>Интерфейс продукта</a:t>
+            </a:r>
+          </a:p>
+        </p:txBody>
+      </p:sp>
+      <p:sp>
+        <p:nvSpPr>
+          <p:cNvPr id="3" name="Номер слайда 2">
+            <a:extLst>
+              <a:ext uri="{FF2B5EF4-FFF2-40B4-BE49-F238E27FC236}">
+                <a16:creationId xmlns:a16="http://schemas.microsoft.com/office/drawing/2014/main" id="{ED4C32D0-FD32-F810-B123-2B4A0015A795}"/>
+              </a:ext>
+            </a:extLst>
+          </p:cNvPr>
+          <p:cNvSpPr>
+            <a:spLocks noGrp="1"/>
+          </p:cNvSpPr>
+          <p:nvPr>
+            <p:ph type="sldNum" sz="quarter" idx="12"/>
+          </p:nvPr>
+        </p:nvSpPr>
+        <p:spPr/>
+        <p:txBody>
+          <a:bodyPr/>
+          <a:lstStyle/>
+          <a:p>
+            <a:fld id="{C792C54E-EFF1-4B00-8652-01128ACE980F}" type="slidenum">
+              <a:rPr lang="ru-RU" smtClean="0"/>
+              <a:pPr/>
+              <a:t>14</a:t>
+            </a:fld>
+            <a:endParaRPr lang="ru-RU"/>
+          </a:p>
+        </p:txBody>
+      </p:sp>
+      <p:sp>
+        <p:nvSpPr>
+          <p:cNvPr id="4" name="Объект 6">
+            <a:extLst>
+              <a:ext uri="{FF2B5EF4-FFF2-40B4-BE49-F238E27FC236}">
+                <a16:creationId xmlns:a16="http://schemas.microsoft.com/office/drawing/2014/main" id="{E99DCA30-8A31-90B6-9ED7-5CD3425A8E7D}"/>
+              </a:ext>
+            </a:extLst>
+          </p:cNvPr>
+          <p:cNvSpPr>
+            <a:spLocks noGrp="1"/>
+          </p:cNvSpPr>
+          <p:nvPr>
+            <p:ph idx="1"/>
+          </p:nvPr>
+        </p:nvSpPr>
+        <p:spPr>
+          <a:xfrm>
+            <a:off x="3846022" y="5892166"/>
+            <a:ext cx="4764578" cy="391402"/>
+          </a:xfrm>
+        </p:spPr>
+        <p:txBody>
+          <a:bodyPr>
+            <a:normAutofit lnSpcReduction="10000"/>
+          </a:bodyPr>
+          <a:lstStyle/>
+          <a:p>
+            <a:pPr marL="0" indent="0">
+              <a:buNone/>
+            </a:pPr>
+            <a:r>
+              <a:rPr lang="ru-RU" sz="2400" dirty="0">
+                <a:cs typeface="Times New Roman" panose="02020603050405020304" pitchFamily="18" charset="0"/>
+              </a:rPr>
+              <a:t>Страница </a:t>
+            </a:r>
+            <a:r>
+              <a:rPr lang="en-US" sz="2400" dirty="0">
+                <a:cs typeface="Times New Roman" panose="02020603050405020304" pitchFamily="18" charset="0"/>
+              </a:rPr>
+              <a:t>“</a:t>
+            </a:r>
+            <a:r>
+              <a:rPr lang="ru-RU" sz="2400" dirty="0">
+                <a:cs typeface="Times New Roman" panose="02020603050405020304" pitchFamily="18" charset="0"/>
+              </a:rPr>
+              <a:t>Мониторинг</a:t>
+            </a:r>
+            <a:r>
+              <a:rPr lang="en-US" sz="2400" dirty="0">
+                <a:cs typeface="Times New Roman" panose="02020603050405020304" pitchFamily="18" charset="0"/>
+              </a:rPr>
+              <a:t>”</a:t>
+            </a:r>
+            <a:endParaRPr lang="ru-RU" sz="2400" dirty="0">
+              <a:cs typeface="Times New Roman" panose="02020603050405020304" pitchFamily="18" charset="0"/>
+            </a:endParaRPr>
+          </a:p>
+          <a:p>
+            <a:pPr marL="0" indent="0">
+              <a:buNone/>
+            </a:pPr>
+            <a:endParaRPr lang="ru-RU" sz="2400" dirty="0">
+              <a:cs typeface="Times New Roman" panose="02020603050405020304" pitchFamily="18" charset="0"/>
+            </a:endParaRPr>
+          </a:p>
+        </p:txBody>
+      </p:sp>
+    </p:spTree>
+    <p:extLst>
+      <p:ext uri="{BB962C8B-B14F-4D97-AF65-F5344CB8AC3E}">
+        <p14:creationId xmlns:p14="http://schemas.microsoft.com/office/powerpoint/2010/main" val="2955178058"/>
+      </p:ext>
+    </p:extLst>
+  </p:cSld>
+  <p:clrMapOvr>
+    <a:masterClrMapping/>
+  </p:clrMapOvr>
+</p:sld>
+</file>
+
+<file path=ppt/slides/slide15.xml><?xml version="1.0" encoding="utf-8"?>
+<p:sld xmlns:a="http://schemas.openxmlformats.org/drawingml/2006/main" xmlns:r="http://schemas.openxmlformats.org/officeDocument/2006/relationships" xmlns:p="http://schemas.openxmlformats.org/presentationml/2006/main">
+  <p:cSld>
+    <p:spTree>
+      <p:nvGrpSpPr>
+        <p:cNvPr id="1" name=""/>
+        <p:cNvGrpSpPr/>
+        <p:nvPr/>
+      </p:nvGrpSpPr>
+      <p:grpSpPr>
+        <a:xfrm>
+          <a:off x="0" y="0"/>
+          <a:ext cx="0" cy="0"/>
+          <a:chOff x="0" y="0"/>
+          <a:chExt cx="0" cy="0"/>
+        </a:xfrm>
+      </p:grpSpPr>
+      <p:sp>
+        <p:nvSpPr>
+          <p:cNvPr id="2" name="Заголовок 1">
+            <a:extLst>
+              <a:ext uri="{FF2B5EF4-FFF2-40B4-BE49-F238E27FC236}">
+                <a16:creationId xmlns:a16="http://schemas.microsoft.com/office/drawing/2014/main" id="{DD01C50A-C6E6-44F5-AF9B-2730E5C2088D}"/>
+              </a:ext>
+            </a:extLst>
+          </p:cNvPr>
+          <p:cNvSpPr>
+            <a:spLocks noGrp="1"/>
+          </p:cNvSpPr>
+          <p:nvPr>
+            <p:ph type="title"/>
+          </p:nvPr>
+        </p:nvSpPr>
+        <p:spPr>
+          <a:xfrm>
+            <a:off x="838200" y="0"/>
+            <a:ext cx="10515600" cy="1325563"/>
+          </a:xfrm>
+        </p:spPr>
+        <p:txBody>
+          <a:bodyPr/>
+          <a:lstStyle/>
+          <a:p>
+            <a:r>
+              <a:rPr lang="ru-RU" b="1" dirty="0">
+                <a:latin typeface="+mn-lt"/>
+              </a:rPr>
+              <a:t>Заключение</a:t>
+            </a:r>
+          </a:p>
+        </p:txBody>
+      </p:sp>
+      <p:sp>
+        <p:nvSpPr>
+          <p:cNvPr id="3" name="Объект 2">
+            <a:extLst>
+              <a:ext uri="{FF2B5EF4-FFF2-40B4-BE49-F238E27FC236}">
+                <a16:creationId xmlns:a16="http://schemas.microsoft.com/office/drawing/2014/main" id="{EAD7845B-26BC-4B97-B7FD-7A49131438E8}"/>
+              </a:ext>
+            </a:extLst>
+          </p:cNvPr>
+          <p:cNvSpPr>
+            <a:spLocks noGrp="1"/>
+          </p:cNvSpPr>
+          <p:nvPr>
+            <p:ph idx="1"/>
+          </p:nvPr>
+        </p:nvSpPr>
+        <p:spPr>
+          <a:xfrm>
+            <a:off x="838200" y="1228357"/>
             <a:ext cx="10515600" cy="4826187"/>
           </a:xfrm>
         </p:spPr>
@@ -4405,75 +5290,85 @@
           <a:p>
             <a:pPr marL="0" indent="0" algn="just">
               <a:lnSpc>
-                <a:spcPct val="150000"/>
+                <a:spcPct val="100000"/>
               </a:lnSpc>
               <a:buNone/>
             </a:pPr>
             <a:r>
-              <a:rPr lang="ru-RU" sz="2000" dirty="0">
+              <a:rPr lang="ru-RU" sz="2400" dirty="0">
                 <a:solidFill>
                   <a:srgbClr val="000000"/>
                 </a:solidFill>
                 <a:ea typeface="Cambria" panose="02040503050406030204" pitchFamily="18" charset="0"/>
               </a:rPr>
-              <a:t>В данным момент в ходе реализации поставленной цели были выполнены следующие задачи:</a:t>
+              <a:t>В ходе реализации поставленной цели были выполнены следующие задачи:</a:t>
             </a:r>
           </a:p>
           <a:p>
             <a:pPr algn="just">
               <a:lnSpc>
-                <a:spcPct val="150000"/>
+                <a:spcPct val="100000"/>
               </a:lnSpc>
             </a:pPr>
             <a:r>
-              <a:rPr lang="ru-RU" sz="2000" dirty="0">
+              <a:rPr lang="ru-RU" sz="2400" dirty="0">
                 <a:solidFill>
                   <a:srgbClr val="000000"/>
                 </a:solidFill>
                 <a:ea typeface="Cambria" panose="02040503050406030204" pitchFamily="18" charset="0"/>
               </a:rPr>
-              <a:t>Выявлены ключевые потребности, которые должен покрывать продукт.</a:t>
+              <a:t>Выявлены ключевые потребности, которые должен покрывать продукт и разработано ТЗ.</a:t>
             </a:r>
           </a:p>
           <a:p>
             <a:pPr algn="just">
               <a:lnSpc>
-                <a:spcPct val="150000"/>
+                <a:spcPct val="100000"/>
               </a:lnSpc>
             </a:pPr>
             <a:r>
-              <a:rPr lang="ru-RU" sz="2000" dirty="0">
+              <a:rPr lang="ru-RU" sz="2400" dirty="0">
                 <a:solidFill>
                   <a:srgbClr val="000000"/>
                 </a:solidFill>
                 <a:ea typeface="Cambria" panose="02040503050406030204" pitchFamily="18" charset="0"/>
               </a:rPr>
-              <a:t>Разработка технического задания и согласование с заказчиком, внесение правок в ТЗ. </a:t>
+              <a:t>Разработан интерфейса веб-клиента, согласно представленному макету.</a:t>
             </a:r>
           </a:p>
           <a:p>
             <a:pPr algn="just">
               <a:lnSpc>
-                <a:spcPct val="150000"/>
+                <a:spcPct val="100000"/>
               </a:lnSpc>
             </a:pPr>
             <a:r>
-              <a:rPr lang="ru-RU" sz="2000" dirty="0">
+              <a:rPr lang="ru-RU" sz="2400" dirty="0">
                 <a:solidFill>
                   <a:srgbClr val="000000"/>
                 </a:solidFill>
                 <a:ea typeface="Cambria" panose="02040503050406030204" pitchFamily="18" charset="0"/>
               </a:rPr>
-              <a:t>Разработка макета веб-клиента, диаграмм. </a:t>
-            </a:r>
-          </a:p>
-          <a:p>
-            <a:pPr algn="just">
+              <a:t>Разработана серверная часть продукта</a:t>
+            </a:r>
+            <a:r>
+              <a:rPr lang="en-US" sz="2400" dirty="0">
+                <a:solidFill>
+                  <a:srgbClr val="000000"/>
+                </a:solidFill>
+                <a:ea typeface="Cambria" panose="02040503050406030204" pitchFamily="18" charset="0"/>
+              </a:rPr>
+              <a:t>. </a:t>
+            </a:r>
+          </a:p>
+          <a:p>
+            <a:pPr marL="0" indent="0" algn="just">
               <a:lnSpc>
-                <a:spcPct val="150000"/>
+                <a:spcPct val="100000"/>
               </a:lnSpc>
+              <a:buNone/>
             </a:pPr>
-            <a:endParaRPr lang="ru-RU" sz="1500" dirty="0">
+            <a:endParaRPr lang="en-US" sz="2400" dirty="0">
               <a:solidFill>
                 <a:srgbClr val="000000"/>
               </a:solidFill>
@@ -4483,16 +5378,89 @@
           <a:p>
             <a:pPr marL="0" indent="0" algn="just">
               <a:lnSpc>
-                <a:spcPct val="150000"/>
+                <a:spcPct val="100000"/>
               </a:lnSpc>
               <a:buNone/>
             </a:pPr>
-            <a:endParaRPr lang="ru-RU" sz="1500" dirty="0">
+            <a:r>
+              <a:rPr lang="ru-RU" sz="2400" dirty="0">
+                <a:solidFill>
+                  <a:srgbClr val="000000"/>
+                </a:solidFill>
+                <a:ea typeface="Cambria" panose="02040503050406030204" pitchFamily="18" charset="0"/>
+              </a:rPr>
+              <a:t>Разработанное решение находится в процессе тестирования на стороне заказчика.</a:t>
+            </a:r>
+          </a:p>
+          <a:p>
+            <a:pPr algn="just">
+              <a:lnSpc>
+                <a:spcPct val="100000"/>
+              </a:lnSpc>
+            </a:pPr>
+            <a:endParaRPr lang="ru-RU" sz="2400" dirty="0">
               <a:solidFill>
                 <a:srgbClr val="000000"/>
               </a:solidFill>
               <a:ea typeface="Cambria" panose="02040503050406030204" pitchFamily="18" charset="0"/>
             </a:endParaRPr>
+          </a:p>
+          <a:p>
+            <a:pPr algn="just">
+              <a:lnSpc>
+                <a:spcPct val="100000"/>
+              </a:lnSpc>
+            </a:pPr>
+            <a:endParaRPr lang="ru-RU" sz="2400" dirty="0">
+              <a:solidFill>
+                <a:srgbClr val="000000"/>
+              </a:solidFill>
+              <a:ea typeface="Cambria" panose="02040503050406030204" pitchFamily="18" charset="0"/>
+            </a:endParaRPr>
+          </a:p>
+          <a:p>
+            <a:pPr marL="0" indent="0" algn="just">
+              <a:lnSpc>
+                <a:spcPct val="100000"/>
+              </a:lnSpc>
+              <a:buNone/>
+            </a:pPr>
+            <a:endParaRPr lang="ru-RU" sz="2400" dirty="0">
+              <a:solidFill>
+                <a:srgbClr val="000000"/>
+              </a:solidFill>
+              <a:ea typeface="Cambria" panose="02040503050406030204" pitchFamily="18" charset="0"/>
+            </a:endParaRPr>
+          </a:p>
+        </p:txBody>
+      </p:sp>
+      <p:sp>
+        <p:nvSpPr>
+          <p:cNvPr id="4" name="Номер слайда 3">
+            <a:extLst>
+              <a:ext uri="{FF2B5EF4-FFF2-40B4-BE49-F238E27FC236}">
+                <a16:creationId xmlns:a16="http://schemas.microsoft.com/office/drawing/2014/main" id="{225EEB23-ED4F-A95C-E704-2D1299DFF7D5}"/>
+              </a:ext>
+            </a:extLst>
+          </p:cNvPr>
+          <p:cNvSpPr>
+            <a:spLocks noGrp="1"/>
+          </p:cNvSpPr>
+          <p:nvPr>
+            <p:ph type="sldNum" sz="quarter" idx="12"/>
+          </p:nvPr>
+        </p:nvSpPr>
+        <p:spPr/>
+        <p:txBody>
+          <a:bodyPr/>
+          <a:lstStyle/>
+          <a:p>
+            <a:fld id="{C792C54E-EFF1-4B00-8652-01128ACE980F}" type="slidenum">
+              <a:rPr lang="ru-RU" smtClean="0"/>
+              <a:pPr/>
+              <a:t>15</a:t>
+            </a:fld>
+            <a:endParaRPr lang="ru-RU"/>
           </a:p>
         </p:txBody>
       </p:sp>
@@ -4544,7 +5512,7 @@
         </p:nvSpPr>
         <p:spPr>
           <a:xfrm>
-            <a:off x="838200" y="-110004"/>
+            <a:off x="870065" y="0"/>
             <a:ext cx="10515600" cy="1325563"/>
           </a:xfrm>
         </p:spPr>
@@ -4553,7 +5521,10 @@
           <a:lstStyle/>
           <a:p>
             <a:r>
-              <a:rPr lang="ru-RU" b="1" dirty="0"/>
+              <a:rPr lang="ru-RU" b="1" dirty="0">
+                <a:latin typeface="+mn-lt"/>
+                <a:cs typeface="Times New Roman" panose="02020603050405020304" pitchFamily="18" charset="0"/>
+              </a:rPr>
               <a:t>Актуальность</a:t>
             </a:r>
           </a:p>
@@ -4577,32 +5548,45 @@
         </p:nvSpPr>
         <p:spPr>
           <a:xfrm>
-            <a:off x="838200" y="1022168"/>
+            <a:off x="838200" y="1369325"/>
             <a:ext cx="10515600" cy="792069"/>
           </a:xfrm>
         </p:spPr>
         <p:txBody>
-          <a:bodyPr/>
+          <a:bodyPr>
+            <a:normAutofit lnSpcReduction="10000"/>
+          </a:bodyPr>
           <a:lstStyle/>
           <a:p>
             <a:pPr marL="0" indent="0">
               <a:buNone/>
             </a:pPr>
             <a:r>
-              <a:rPr lang="ru-RU" dirty="0"/>
+              <a:rPr lang="ru-RU" dirty="0">
+                <a:cs typeface="Times New Roman" panose="02020603050405020304" pitchFamily="18" charset="0"/>
+              </a:rPr>
               <a:t>Разработано по заказу компании ООО «БАЙТ» («Автотрейд»</a:t>
             </a:r>
             <a:r>
-              <a:rPr lang="en-US" dirty="0"/>
-              <a:t>).</a:t>
-            </a:r>
-            <a:endParaRPr lang="ru-RU" dirty="0"/>
+              <a:rPr lang="en-US" dirty="0">
+                <a:cs typeface="Times New Roman" panose="02020603050405020304" pitchFamily="18" charset="0"/>
+              </a:rPr>
+              <a:t>) </a:t>
+            </a:r>
+            <a:r>
+              <a:rPr lang="ru-RU" dirty="0">
+                <a:cs typeface="Times New Roman" panose="02020603050405020304" pitchFamily="18" charset="0"/>
+              </a:rPr>
+              <a:t>для внутреннего использования.</a:t>
+            </a:r>
           </a:p>
           <a:p>
             <a:pPr marL="0" indent="0">
               <a:buNone/>
             </a:pPr>
-            <a:endParaRPr lang="ru-RU" dirty="0"/>
+            <a:endParaRPr lang="ru-RU" dirty="0">
+              <a:cs typeface="Times New Roman" panose="02020603050405020304" pitchFamily="18" charset="0"/>
+            </a:endParaRPr>
           </a:p>
         </p:txBody>
       </p:sp>
@@ -4635,7 +5619,7 @@
         </p:blipFill>
         <p:spPr bwMode="auto">
           <a:xfrm>
-            <a:off x="3950629" y="2586433"/>
+            <a:off x="4075320" y="2968818"/>
             <a:ext cx="3578494" cy="2892792"/>
           </a:xfrm>
           <a:prstGeom prst="rect">
@@ -4653,6 +5637,36 @@
           </a:extLst>
         </p:spPr>
       </p:pic>
+      <p:sp>
+        <p:nvSpPr>
+          <p:cNvPr id="3" name="Номер слайда 2">
+            <a:extLst>
+              <a:ext uri="{FF2B5EF4-FFF2-40B4-BE49-F238E27FC236}">
+                <a16:creationId xmlns:a16="http://schemas.microsoft.com/office/drawing/2014/main" id="{3702737B-4A0B-CCBE-B496-CC0E47113D02}"/>
+              </a:ext>
+            </a:extLst>
+          </p:cNvPr>
+          <p:cNvSpPr>
+            <a:spLocks noGrp="1"/>
+          </p:cNvSpPr>
+          <p:nvPr>
+            <p:ph type="sldNum" sz="quarter" idx="12"/>
+          </p:nvPr>
+        </p:nvSpPr>
+        <p:spPr/>
+        <p:txBody>
+          <a:bodyPr/>
+          <a:lstStyle/>
+          <a:p>
+            <a:fld id="{C792C54E-EFF1-4B00-8652-01128ACE980F}" type="slidenum">
+              <a:rPr lang="ru-RU" smtClean="0"/>
+              <a:pPr/>
+              <a:t>2</a:t>
+            </a:fld>
+            <a:endParaRPr lang="ru-RU" dirty="0"/>
+          </a:p>
+        </p:txBody>
+      </p:sp>
     </p:spTree>
     <p:extLst>
       <p:ext uri="{BB962C8B-B14F-4D97-AF65-F5344CB8AC3E}">
@@ -4699,43 +5713,51 @@
             <p:ph type="title"/>
           </p:nvPr>
         </p:nvSpPr>
-        <p:spPr/>
-        <p:txBody>
-          <a:bodyPr/>
-          <a:lstStyle/>
-          <a:p>
-            <a:r>
-              <a:rPr lang="ru-RU" b="1" dirty="0"/>
-              <a:t>Цель и задачи</a:t>
-            </a:r>
-          </a:p>
-        </p:txBody>
-      </p:sp>
-      <p:sp>
-        <p:nvSpPr>
-          <p:cNvPr id="3" name="Объект 2">
-            <a:extLst>
-              <a:ext uri="{FF2B5EF4-FFF2-40B4-BE49-F238E27FC236}">
-                <a16:creationId xmlns:a16="http://schemas.microsoft.com/office/drawing/2014/main" id="{46E749BE-F775-49AC-8E09-FEBAA2E48A1D}"/>
-              </a:ext>
-            </a:extLst>
-          </p:cNvPr>
-          <p:cNvSpPr>
-            <a:spLocks noGrp="1"/>
-          </p:cNvSpPr>
-          <p:nvPr>
-            <p:ph idx="1"/>
-          </p:nvPr>
-        </p:nvSpPr>
         <p:spPr>
           <a:xfrm>
-            <a:off x="838200" y="1690688"/>
+            <a:off x="838200" y="0"/>
+            <a:ext cx="10515600" cy="1325563"/>
+          </a:xfrm>
+        </p:spPr>
+        <p:txBody>
+          <a:bodyPr/>
+          <a:lstStyle/>
+          <a:p>
+            <a:r>
+              <a:rPr lang="ru-RU" b="1" dirty="0">
+                <a:latin typeface="+mn-lt"/>
+                <a:cs typeface="Times New Roman" panose="02020603050405020304" pitchFamily="18" charset="0"/>
+              </a:rPr>
+              <a:t>Цель и задачи</a:t>
+            </a:r>
+          </a:p>
+        </p:txBody>
+      </p:sp>
+      <p:sp>
+        <p:nvSpPr>
+          <p:cNvPr id="3" name="Объект 2">
+            <a:extLst>
+              <a:ext uri="{FF2B5EF4-FFF2-40B4-BE49-F238E27FC236}">
+                <a16:creationId xmlns:a16="http://schemas.microsoft.com/office/drawing/2014/main" id="{46E749BE-F775-49AC-8E09-FEBAA2E48A1D}"/>
+              </a:ext>
+            </a:extLst>
+          </p:cNvPr>
+          <p:cNvSpPr>
+            <a:spLocks noGrp="1"/>
+          </p:cNvSpPr>
+          <p:nvPr>
+            <p:ph idx="1"/>
+          </p:nvPr>
+        </p:nvSpPr>
+        <p:spPr>
+          <a:xfrm>
+            <a:off x="838200" y="1325563"/>
             <a:ext cx="10515600" cy="4539783"/>
           </a:xfrm>
         </p:spPr>
         <p:txBody>
           <a:bodyPr>
-            <a:normAutofit/>
+            <a:noAutofit/>
           </a:bodyPr>
           <a:lstStyle/>
           <a:p>
@@ -4745,18 +5767,26 @@
               </a:lnSpc>
             </a:pPr>
             <a:r>
-              <a:rPr lang="ru-RU" dirty="0"/>
+              <a:rPr lang="ru-RU" sz="2400" b="1" dirty="0">
+                <a:cs typeface="Times New Roman" panose="02020603050405020304" pitchFamily="18" charset="0"/>
+              </a:rPr>
               <a:t>Цель работы: </a:t>
             </a:r>
             <a:r>
-              <a:rPr lang="ru-RU" sz="2000" dirty="0"/>
+              <a:rPr lang="ru-RU" sz="2400" dirty="0">
+                <a:cs typeface="Times New Roman" panose="02020603050405020304" pitchFamily="18" charset="0"/>
+              </a:rPr>
               <a:t>Разработка системы централизованного управления копиями баз данных MS SQL с возможностью создания образов и развёртывания клонов через веб-интерфейс на .NET Core и Blazor</a:t>
             </a:r>
             <a:r>
-              <a:rPr lang="en-US" sz="2000" dirty="0"/>
+              <a:rPr lang="en-US" sz="2400" dirty="0">
+                <a:cs typeface="Times New Roman" panose="02020603050405020304" pitchFamily="18" charset="0"/>
+              </a:rPr>
               <a:t>.</a:t>
             </a:r>
-            <a:endParaRPr lang="ru-RU" sz="2000" dirty="0"/>
+            <a:endParaRPr lang="ru-RU" sz="2400" dirty="0">
+              <a:cs typeface="Times New Roman" panose="02020603050405020304" pitchFamily="18" charset="0"/>
+            </a:endParaRPr>
           </a:p>
           <a:p>
             <a:pPr>
@@ -4765,7 +5795,9 @@
               </a:lnSpc>
             </a:pPr>
             <a:r>
-              <a:rPr lang="ru-RU" dirty="0"/>
+              <a:rPr lang="ru-RU" sz="2400" b="1" dirty="0">
+                <a:cs typeface="Times New Roman" panose="02020603050405020304" pitchFamily="18" charset="0"/>
+              </a:rPr>
               <a:t>Задачи:</a:t>
             </a:r>
           </a:p>
@@ -4779,11 +5811,12 @@
               </a:tabLst>
             </a:pPr>
             <a:r>
-              <a:rPr lang="ru-RU" sz="2000" dirty="0">
+              <a:rPr lang="ru-RU" dirty="0">
                 <a:solidFill>
                   <a:srgbClr val="000000"/>
                 </a:solidFill>
                 <a:ea typeface="Cambria" panose="02040503050406030204" pitchFamily="18" charset="0"/>
+                <a:cs typeface="Times New Roman" panose="02020603050405020304" pitchFamily="18" charset="0"/>
               </a:rPr>
               <a:t>Разработка ТЗ</a:t>
             </a:r>
@@ -4798,11 +5831,12 @@
               </a:tabLst>
             </a:pPr>
             <a:r>
-              <a:rPr lang="ru-RU" sz="2000" dirty="0">
+              <a:rPr lang="ru-RU" dirty="0">
                 <a:solidFill>
                   <a:srgbClr val="000000"/>
                 </a:solidFill>
                 <a:ea typeface="Cambria" panose="02040503050406030204" pitchFamily="18" charset="0"/>
+                <a:cs typeface="Times New Roman" panose="02020603050405020304" pitchFamily="18" charset="0"/>
               </a:rPr>
               <a:t>Разработка архитектуры согласно ТЗ</a:t>
             </a:r>
@@ -4817,11 +5851,12 @@
               </a:tabLst>
             </a:pPr>
             <a:r>
-              <a:rPr lang="ru-RU" sz="2000" dirty="0">
+              <a:rPr lang="ru-RU" dirty="0">
                 <a:solidFill>
                   <a:srgbClr val="000000"/>
                 </a:solidFill>
                 <a:ea typeface="Cambria" panose="02040503050406030204" pitchFamily="18" charset="0"/>
+                <a:cs typeface="Times New Roman" panose="02020603050405020304" pitchFamily="18" charset="0"/>
               </a:rPr>
               <a:t>Реализация функционала службы-агента</a:t>
             </a:r>
@@ -4836,11 +5871,12 @@
               </a:tabLst>
             </a:pPr>
             <a:r>
-              <a:rPr lang="ru-RU" sz="2000" dirty="0">
+              <a:rPr lang="ru-RU" dirty="0">
                 <a:solidFill>
                   <a:srgbClr val="000000"/>
                 </a:solidFill>
                 <a:ea typeface="Cambria" panose="02040503050406030204" pitchFamily="18" charset="0"/>
+                <a:cs typeface="Times New Roman" panose="02020603050405020304" pitchFamily="18" charset="0"/>
               </a:rPr>
               <a:t>Разработка клиентской (браузерной) части веб-приложения </a:t>
             </a:r>
@@ -4855,11 +5891,12 @@
               </a:tabLst>
             </a:pPr>
             <a:r>
-              <a:rPr lang="ru-RU" sz="2000" dirty="0">
+              <a:rPr lang="ru-RU" dirty="0">
                 <a:solidFill>
                   <a:srgbClr val="000000"/>
                 </a:solidFill>
                 <a:ea typeface="Cambria" panose="02040503050406030204" pitchFamily="18" charset="0"/>
+                <a:cs typeface="Times New Roman" panose="02020603050405020304" pitchFamily="18" charset="0"/>
               </a:rPr>
               <a:t>Разработка серверной части веб-приложения </a:t>
             </a:r>
@@ -4874,11 +5911,12 @@
               </a:tabLst>
             </a:pPr>
             <a:r>
-              <a:rPr lang="ru-RU" sz="2000" dirty="0">
+              <a:rPr lang="ru-RU" dirty="0">
                 <a:solidFill>
                   <a:srgbClr val="000000"/>
                 </a:solidFill>
                 <a:ea typeface="Cambria" panose="02040503050406030204" pitchFamily="18" charset="0"/>
+                <a:cs typeface="Times New Roman" panose="02020603050405020304" pitchFamily="18" charset="0"/>
               </a:rPr>
               <a:t>Тестирование и отладка веб-приложения</a:t>
             </a:r>
@@ -4892,9 +5930,40 @@
                 <a:tab pos="630555" algn="l"/>
               </a:tabLst>
             </a:pPr>
-            <a:endParaRPr lang="ru-RU" sz="2000" dirty="0">
+            <a:endParaRPr lang="ru-RU" dirty="0">
               <a:ea typeface="Cambria" panose="02040503050406030204" pitchFamily="18" charset="0"/>
+              <a:cs typeface="Times New Roman" panose="02020603050405020304" pitchFamily="18" charset="0"/>
             </a:endParaRPr>
+          </a:p>
+        </p:txBody>
+      </p:sp>
+      <p:sp>
+        <p:nvSpPr>
+          <p:cNvPr id="4" name="Номер слайда 3">
+            <a:extLst>
+              <a:ext uri="{FF2B5EF4-FFF2-40B4-BE49-F238E27FC236}">
+                <a16:creationId xmlns:a16="http://schemas.microsoft.com/office/drawing/2014/main" id="{9F368E3C-D348-87CF-4E12-8755DECFC4DA}"/>
+              </a:ext>
+            </a:extLst>
+          </p:cNvPr>
+          <p:cNvSpPr>
+            <a:spLocks noGrp="1"/>
+          </p:cNvSpPr>
+          <p:nvPr>
+            <p:ph type="sldNum" sz="quarter" idx="12"/>
+          </p:nvPr>
+        </p:nvSpPr>
+        <p:spPr/>
+        <p:txBody>
+          <a:bodyPr/>
+          <a:lstStyle/>
+          <a:p>
+            <a:fld id="{C792C54E-EFF1-4B00-8652-01128ACE980F}" type="slidenum">
+              <a:rPr lang="ru-RU" smtClean="0"/>
+              <a:pPr/>
+              <a:t>3</a:t>
+            </a:fld>
+            <a:endParaRPr lang="ru-RU"/>
           </a:p>
         </p:txBody>
       </p:sp>
@@ -4942,7 +6011,7 @@
           </p:cNvPicPr>
           <p:nvPr/>
         </p:nvPicPr>
-        <p:blipFill>
+        <p:blipFill rotWithShape="1">
           <a:blip r:embed="rId2">
             <a:extLst>
               <a:ext uri="{28A0092B-C50C-407E-A947-70E740481C1C}">
@@ -4950,15 +6019,15 @@
               </a:ext>
             </a:extLst>
           </a:blip>
-          <a:srcRect/>
+          <a:srcRect t="16220" b="20467"/>
           <a:stretch>
             <a:fillRect/>
           </a:stretch>
         </p:blipFill>
         <p:spPr bwMode="auto">
           <a:xfrm>
-            <a:off x="5474430" y="745054"/>
-            <a:ext cx="5659584" cy="5659584"/>
+            <a:off x="5445314" y="2958324"/>
+            <a:ext cx="4895718" cy="3099604"/>
           </a:xfrm>
           <a:prstGeom prst="rect">
             <a:avLst/>
@@ -4993,8 +6062,8 @@
         </p:nvSpPr>
         <p:spPr>
           <a:xfrm>
-            <a:off x="838200" y="0"/>
-            <a:ext cx="10515600" cy="1681316"/>
+            <a:off x="838200" y="-124307"/>
+            <a:ext cx="10515600" cy="1541260"/>
           </a:xfrm>
         </p:spPr>
         <p:txBody>
@@ -5003,9 +6072,6 @@
           <a:p>
             <a:r>
               <a:rPr lang="ru-RU" b="1" dirty="0">
-                <a:solidFill>
-                  <a:srgbClr val="C00000"/>
-                </a:solidFill>
                 <a:latin typeface="+mn-lt"/>
               </a:rPr>
               <a:t>Аналоги</a:t>
@@ -5042,8 +6108,8 @@
         </p:blipFill>
         <p:spPr bwMode="auto">
           <a:xfrm>
-            <a:off x="1402577" y="1541260"/>
-            <a:ext cx="3507476" cy="3597028"/>
+            <a:off x="1909845" y="2958324"/>
+            <a:ext cx="2547178" cy="2612212"/>
           </a:xfrm>
           <a:prstGeom prst="rect">
             <a:avLst/>
@@ -5074,8 +6140,8 @@
         </p:nvSpPr>
         <p:spPr>
           <a:xfrm>
-            <a:off x="2140800" y="5253911"/>
-            <a:ext cx="2031030" cy="369332"/>
+            <a:off x="1909845" y="5570536"/>
+            <a:ext cx="3113844" cy="461665"/>
           </a:xfrm>
           <a:prstGeom prst="rect">
             <a:avLst/>
@@ -5089,18 +6155,83 @@
           <a:lstStyle/>
           <a:p>
             <a:r>
-              <a:rPr lang="en-US" b="1" dirty="0">
+              <a:rPr lang="en-US" sz="2400" b="1" dirty="0">
                 <a:solidFill>
                   <a:srgbClr val="FF0000"/>
                 </a:solidFill>
               </a:rPr>
               <a:t>Redgate SQL clone</a:t>
             </a:r>
-            <a:endParaRPr lang="ru-RU" b="1" dirty="0">
+            <a:endParaRPr lang="ru-RU" sz="2400" b="1" dirty="0">
               <a:solidFill>
                 <a:srgbClr val="FF0000"/>
               </a:solidFill>
             </a:endParaRPr>
+          </a:p>
+        </p:txBody>
+      </p:sp>
+      <p:sp>
+        <p:nvSpPr>
+          <p:cNvPr id="6" name="Номер слайда 5">
+            <a:extLst>
+              <a:ext uri="{FF2B5EF4-FFF2-40B4-BE49-F238E27FC236}">
+                <a16:creationId xmlns:a16="http://schemas.microsoft.com/office/drawing/2014/main" id="{A108B033-9138-7ABF-0D4C-74F7823A5DA3}"/>
+              </a:ext>
+            </a:extLst>
+          </p:cNvPr>
+          <p:cNvSpPr>
+            <a:spLocks noGrp="1"/>
+          </p:cNvSpPr>
+          <p:nvPr>
+            <p:ph type="sldNum" sz="quarter" idx="12"/>
+          </p:nvPr>
+        </p:nvSpPr>
+        <p:spPr/>
+        <p:txBody>
+          <a:bodyPr/>
+          <a:lstStyle/>
+          <a:p>
+            <a:fld id="{C792C54E-EFF1-4B00-8652-01128ACE980F}" type="slidenum">
+              <a:rPr lang="ru-RU" smtClean="0"/>
+              <a:pPr/>
+              <a:t>4</a:t>
+            </a:fld>
+            <a:endParaRPr lang="ru-RU"/>
+          </a:p>
+        </p:txBody>
+      </p:sp>
+      <p:sp>
+        <p:nvSpPr>
+          <p:cNvPr id="8" name="TextBox 7">
+            <a:extLst>
+              <a:ext uri="{FF2B5EF4-FFF2-40B4-BE49-F238E27FC236}">
+                <a16:creationId xmlns:a16="http://schemas.microsoft.com/office/drawing/2014/main" id="{799A861A-E253-17E2-A091-84431EC03268}"/>
+              </a:ext>
+            </a:extLst>
+          </p:cNvPr>
+          <p:cNvSpPr txBox="1"/>
+          <p:nvPr/>
+        </p:nvSpPr>
+        <p:spPr>
+          <a:xfrm>
+            <a:off x="838200" y="1187711"/>
+            <a:ext cx="10515600" cy="1200329"/>
+          </a:xfrm>
+          <a:prstGeom prst="rect">
+            <a:avLst/>
+          </a:prstGeom>
+          <a:noFill/>
+        </p:spPr>
+        <p:txBody>
+          <a:bodyPr wrap="square">
+            <a:spAutoFit/>
+          </a:bodyPr>
+          <a:lstStyle/>
+          <a:p>
+            <a:r>
+              <a:rPr lang="ru-RU" sz="2400" dirty="0"/>
+              <a:t>На рынке присутствуют аналоги разрабатываемого продукта. Однако было принято решение о собственной разработке ввиду высокой стоимости лицензий на готовые коммерческие решения.</a:t>
+            </a:r>
           </a:p>
         </p:txBody>
       </p:sp>
@@ -5172,7 +6303,7 @@
         </p:nvSpPr>
         <p:spPr>
           <a:xfrm>
-            <a:off x="1210359" y="271479"/>
+            <a:off x="678345" y="11301"/>
             <a:ext cx="10515600" cy="1325563"/>
           </a:xfrm>
         </p:spPr>
@@ -5222,7 +6353,7 @@
         </p:blipFill>
         <p:spPr bwMode="auto">
           <a:xfrm>
-            <a:off x="5123182" y="2055768"/>
+            <a:off x="4948615" y="1855640"/>
             <a:ext cx="1830976" cy="1373232"/>
           </a:xfrm>
           <a:prstGeom prst="rect">
@@ -5269,7 +6400,7 @@
         </p:blipFill>
         <p:spPr bwMode="auto">
           <a:xfrm>
-            <a:off x="5166104" y="4209304"/>
+            <a:off x="4991537" y="4177318"/>
             <a:ext cx="1745132" cy="1410735"/>
           </a:xfrm>
           <a:prstGeom prst="rect">
@@ -5309,7 +6440,7 @@
         </p:blipFill>
         <p:spPr>
           <a:xfrm>
-            <a:off x="8961004" y="2138450"/>
+            <a:off x="8530328" y="1855640"/>
             <a:ext cx="1290550" cy="1290550"/>
           </a:xfrm>
           <a:prstGeom prst="rect">
@@ -5339,7 +6470,7 @@
         </p:blipFill>
         <p:spPr>
           <a:xfrm>
-            <a:off x="1253658" y="2055768"/>
+            <a:off x="1079091" y="1891050"/>
             <a:ext cx="1948522" cy="1219730"/>
           </a:xfrm>
           <a:prstGeom prst="rect">
@@ -5361,7 +6492,7 @@
         </p:nvSpPr>
         <p:spPr>
           <a:xfrm>
-            <a:off x="1210359" y="5751052"/>
+            <a:off x="1079091" y="5379952"/>
             <a:ext cx="2305925" cy="369332"/>
           </a:xfrm>
           <a:prstGeom prst="rect">
@@ -5376,15 +6507,27 @@
           <a:lstStyle/>
           <a:p>
             <a:r>
-              <a:rPr lang="ru-RU" dirty="0"/>
+              <a:rPr lang="ru-RU" b="1" dirty="0">
+                <a:solidFill>
+                  <a:srgbClr val="5C2D91"/>
+                </a:solidFill>
+              </a:rPr>
               <a:t>.NET Core  (</a:t>
             </a:r>
             <a:r>
-              <a:rPr lang="en-US" dirty="0"/>
+              <a:rPr lang="en-US" b="1" dirty="0">
+                <a:solidFill>
+                  <a:srgbClr val="5C2D91"/>
+                </a:solidFill>
+              </a:rPr>
               <a:t>ASP.NET</a:t>
             </a:r>
             <a:r>
-              <a:rPr lang="ru-RU" dirty="0"/>
+              <a:rPr lang="ru-RU" b="1" dirty="0">
+                <a:solidFill>
+                  <a:srgbClr val="5C2D91"/>
+                </a:solidFill>
+              </a:rPr>
               <a:t>).</a:t>
             </a:r>
           </a:p>
@@ -5419,7 +6562,7 @@
         </p:blipFill>
         <p:spPr bwMode="auto">
           <a:xfrm>
-            <a:off x="1517181" y="4149788"/>
+            <a:off x="1342614" y="3932467"/>
             <a:ext cx="1421476" cy="1421476"/>
           </a:xfrm>
           <a:prstGeom prst="rect">
@@ -5466,7 +6609,7 @@
         </p:blipFill>
         <p:spPr bwMode="auto">
           <a:xfrm>
-            <a:off x="8655922" y="4230586"/>
+            <a:off x="8166154" y="4015069"/>
             <a:ext cx="2018897" cy="1472402"/>
           </a:xfrm>
           <a:prstGeom prst="rect">
@@ -5484,6 +6627,36 @@
           </a:extLst>
         </p:spPr>
       </p:pic>
+      <p:sp>
+        <p:nvSpPr>
+          <p:cNvPr id="3" name="Номер слайда 2">
+            <a:extLst>
+              <a:ext uri="{FF2B5EF4-FFF2-40B4-BE49-F238E27FC236}">
+                <a16:creationId xmlns:a16="http://schemas.microsoft.com/office/drawing/2014/main" id="{8EB4D9D7-D83E-869C-AEFA-F054D4B5574B}"/>
+              </a:ext>
+            </a:extLst>
+          </p:cNvPr>
+          <p:cNvSpPr>
+            <a:spLocks noGrp="1"/>
+          </p:cNvSpPr>
+          <p:nvPr>
+            <p:ph type="sldNum" sz="quarter" idx="12"/>
+          </p:nvPr>
+        </p:nvSpPr>
+        <p:spPr/>
+        <p:txBody>
+          <a:bodyPr/>
+          <a:lstStyle/>
+          <a:p>
+            <a:fld id="{C792C54E-EFF1-4B00-8652-01128ACE980F}" type="slidenum">
+              <a:rPr lang="ru-RU" smtClean="0"/>
+              <a:pPr/>
+              <a:t>5</a:t>
+            </a:fld>
+            <a:endParaRPr lang="ru-RU"/>
+          </a:p>
+        </p:txBody>
+      </p:sp>
     </p:spTree>
     <p:extLst>
       <p:ext uri="{BB962C8B-B14F-4D97-AF65-F5344CB8AC3E}">
@@ -5526,7 +6699,7 @@
         </p:nvSpPr>
         <p:spPr>
           <a:xfrm>
-            <a:off x="1036608" y="365125"/>
+            <a:off x="838200" y="0"/>
             <a:ext cx="10515600" cy="1325563"/>
           </a:xfrm>
         </p:spPr>
@@ -5535,13 +6708,41 @@
           <a:lstStyle/>
           <a:p>
             <a:r>
-              <a:rPr lang="en-US" b="1" dirty="0"/>
-              <a:t>UML </a:t>
-            </a:r>
-            <a:r>
-              <a:rPr lang="ru-RU" b="1" dirty="0"/>
-              <a:t>диаграмма последовательности для процесса клонирования базы данных</a:t>
-            </a:r>
+              <a:rPr lang="ru-RU" b="1" dirty="0">
+                <a:latin typeface="+mn-lt"/>
+              </a:rPr>
+              <a:t>Диаграмма прецедентов</a:t>
+            </a:r>
+          </a:p>
+        </p:txBody>
+      </p:sp>
+      <p:sp>
+        <p:nvSpPr>
+          <p:cNvPr id="3" name="Номер слайда 2">
+            <a:extLst>
+              <a:ext uri="{FF2B5EF4-FFF2-40B4-BE49-F238E27FC236}">
+                <a16:creationId xmlns:a16="http://schemas.microsoft.com/office/drawing/2014/main" id="{4AC07A3C-6083-16DA-123A-B92DE2D43099}"/>
+              </a:ext>
+            </a:extLst>
+          </p:cNvPr>
+          <p:cNvSpPr>
+            <a:spLocks noGrp="1"/>
+          </p:cNvSpPr>
+          <p:nvPr>
+            <p:ph type="sldNum" sz="quarter" idx="12"/>
+          </p:nvPr>
+        </p:nvSpPr>
+        <p:spPr/>
+        <p:txBody>
+          <a:bodyPr/>
+          <a:lstStyle/>
+          <a:p>
+            <a:fld id="{C792C54E-EFF1-4B00-8652-01128ACE980F}" type="slidenum">
+              <a:rPr lang="ru-RU" smtClean="0"/>
+              <a:pPr/>
+              <a:t>6</a:t>
+            </a:fld>
+            <a:endParaRPr lang="ru-RU"/>
           </a:p>
         </p:txBody>
       </p:sp>
@@ -5550,7 +6751,7 @@
           <p:cNvPr id="6" name="Рисунок 5">
             <a:extLst>
               <a:ext uri="{FF2B5EF4-FFF2-40B4-BE49-F238E27FC236}">
-                <a16:creationId xmlns:a16="http://schemas.microsoft.com/office/drawing/2014/main" id="{C419B42E-70DE-7647-5BC8-A510B3C96B81}"/>
+                <a16:creationId xmlns:a16="http://schemas.microsoft.com/office/drawing/2014/main" id="{5ABEEDCD-1219-B8E0-BA41-10DC8F952C15}"/>
               </a:ext>
             </a:extLst>
           </p:cNvPr>
@@ -5573,8 +6774,8 @@
         </p:blipFill>
         <p:spPr>
           <a:xfrm>
-            <a:off x="1545767" y="1755950"/>
-            <a:ext cx="8679782" cy="4736925"/>
+            <a:off x="121973" y="1325563"/>
+            <a:ext cx="10809263" cy="4919645"/>
           </a:xfrm>
           <a:prstGeom prst="rect">
             <a:avLst/>
@@ -5616,24 +6817,37 @@
             <p:ph type="title"/>
           </p:nvPr>
         </p:nvSpPr>
-        <p:spPr/>
+        <p:spPr>
+          <a:xfrm>
+            <a:off x="838200" y="201787"/>
+            <a:ext cx="10515600" cy="1325563"/>
+          </a:xfrm>
+        </p:spPr>
         <p:txBody>
           <a:bodyPr/>
           <a:lstStyle/>
           <a:p>
             <a:r>
-              <a:rPr lang="ru-RU" b="1" dirty="0"/>
-              <a:t>Диаграмма прецедентов</a:t>
+              <a:rPr lang="en-US" b="1" dirty="0">
+                <a:latin typeface="+mn-lt"/>
+              </a:rPr>
+              <a:t>UML</a:t>
+            </a:r>
+            <a:r>
+              <a:rPr lang="ru-RU" b="1" dirty="0">
+                <a:latin typeface="+mn-lt"/>
+              </a:rPr>
+              <a:t>-диаграмма последовательности для процесса клонирования базы данных</a:t>
             </a:r>
           </a:p>
         </p:txBody>
       </p:sp>
       <p:pic>
         <p:nvPicPr>
-          <p:cNvPr id="4" name="Рисунок 3">
-            <a:extLst>
-              <a:ext uri="{FF2B5EF4-FFF2-40B4-BE49-F238E27FC236}">
-                <a16:creationId xmlns:a16="http://schemas.microsoft.com/office/drawing/2014/main" id="{04203476-AB47-4ABA-19B8-838AAB5D7DC7}"/>
+          <p:cNvPr id="6" name="Рисунок 5">
+            <a:extLst>
+              <a:ext uri="{FF2B5EF4-FFF2-40B4-BE49-F238E27FC236}">
+                <a16:creationId xmlns:a16="http://schemas.microsoft.com/office/drawing/2014/main" id="{C419B42E-70DE-7647-5BC8-A510B3C96B81}"/>
               </a:ext>
             </a:extLst>
           </p:cNvPr>
@@ -5656,14 +6870,44 @@
         </p:blipFill>
         <p:spPr>
           <a:xfrm>
-            <a:off x="235974" y="1690688"/>
-            <a:ext cx="11452979" cy="4503732"/>
+            <a:off x="1412763" y="1675450"/>
+            <a:ext cx="8911644" cy="4863462"/>
           </a:xfrm>
           <a:prstGeom prst="rect">
             <a:avLst/>
           </a:prstGeom>
         </p:spPr>
       </p:pic>
+      <p:sp>
+        <p:nvSpPr>
+          <p:cNvPr id="3" name="Номер слайда 2">
+            <a:extLst>
+              <a:ext uri="{FF2B5EF4-FFF2-40B4-BE49-F238E27FC236}">
+                <a16:creationId xmlns:a16="http://schemas.microsoft.com/office/drawing/2014/main" id="{0CAAE307-F01B-B820-2B36-01BE70B7F5D2}"/>
+              </a:ext>
+            </a:extLst>
+          </p:cNvPr>
+          <p:cNvSpPr>
+            <a:spLocks noGrp="1"/>
+          </p:cNvSpPr>
+          <p:nvPr>
+            <p:ph type="sldNum" sz="quarter" idx="12"/>
+          </p:nvPr>
+        </p:nvSpPr>
+        <p:spPr/>
+        <p:txBody>
+          <a:bodyPr/>
+          <a:lstStyle/>
+          <a:p>
+            <a:fld id="{C792C54E-EFF1-4B00-8652-01128ACE980F}" type="slidenum">
+              <a:rPr lang="ru-RU" smtClean="0"/>
+              <a:pPr/>
+              <a:t>7</a:t>
+            </a:fld>
+            <a:endParaRPr lang="ru-RU"/>
+          </a:p>
+        </p:txBody>
+      </p:sp>
     </p:spTree>
   </p:cSld>
   <p:clrMapOvr>
@@ -5677,7 +6921,13 @@
   <p:cSld>
     <p:spTree>
       <p:nvGrpSpPr>
-        <p:cNvPr id="1" name=""/>
+        <p:cNvPr id="1" name="">
+          <a:extLst>
+            <a:ext uri="{FF2B5EF4-FFF2-40B4-BE49-F238E27FC236}">
+              <a16:creationId xmlns:a16="http://schemas.microsoft.com/office/drawing/2014/main" id="{C4B2D2B7-CAC7-F644-91FE-4FF98FA99AA7}"/>
+            </a:ext>
+          </a:extLst>
+        </p:cNvPr>
         <p:cNvGrpSpPr/>
         <p:nvPr/>
       </p:nvGrpSpPr>
@@ -5689,59 +6939,219 @@
           <a:chExt cx="0" cy="0"/>
         </a:xfrm>
       </p:grpSpPr>
-      <p:sp>
-        <p:nvSpPr>
-          <p:cNvPr id="2" name="Заголовок 1"/>
-          <p:cNvSpPr>
-            <a:spLocks noGrp="1"/>
-          </p:cNvSpPr>
-          <p:nvPr>
-            <p:ph type="title"/>
-          </p:nvPr>
-        </p:nvSpPr>
-        <p:spPr/>
-        <p:txBody>
-          <a:bodyPr/>
-          <a:lstStyle/>
-          <a:p>
-            <a:r>
-              <a:rPr lang="ru-RU" dirty="0"/>
-              <a:t>Макет веб-клиента</a:t>
-            </a:r>
-          </a:p>
-        </p:txBody>
-      </p:sp>
       <p:pic>
         <p:nvPicPr>
-          <p:cNvPr id="17" name="Рисунок 16">
-            <a:extLst>
-              <a:ext uri="{FF2B5EF4-FFF2-40B4-BE49-F238E27FC236}">
-                <a16:creationId xmlns:a16="http://schemas.microsoft.com/office/drawing/2014/main" id="{0116415B-0FF3-9266-88BF-6B785AB2E862}"/>
+          <p:cNvPr id="5124" name="Picture 4">
+            <a:extLst>
+              <a:ext uri="{FF2B5EF4-FFF2-40B4-BE49-F238E27FC236}">
+                <a16:creationId xmlns:a16="http://schemas.microsoft.com/office/drawing/2014/main" id="{88C7727B-2B50-E712-93FE-5AB120B13670}"/>
               </a:ext>
             </a:extLst>
           </p:cNvPr>
           <p:cNvPicPr>
-            <a:picLocks noChangeAspect="1"/>
+            <a:picLocks noChangeAspect="1" noChangeArrowheads="1"/>
           </p:cNvPicPr>
           <p:nvPr/>
         </p:nvPicPr>
         <p:blipFill>
-          <a:blip r:embed="rId2"/>
+          <a:blip r:embed="rId2">
+            <a:extLst>
+              <a:ext uri="{28A0092B-C50C-407E-A947-70E740481C1C}">
+                <a14:useLocalDpi xmlns:a14="http://schemas.microsoft.com/office/drawing/2010/main" val="0"/>
+              </a:ext>
+            </a:extLst>
+          </a:blip>
+          <a:srcRect/>
           <a:stretch>
             <a:fillRect/>
           </a:stretch>
         </p:blipFill>
-        <p:spPr>
+        <p:spPr bwMode="auto">
           <a:xfrm>
-            <a:off x="940740" y="1607223"/>
-            <a:ext cx="7412148" cy="4841461"/>
+            <a:off x="2825052" y="2423904"/>
+            <a:ext cx="6361296" cy="2912281"/>
           </a:xfrm>
           <a:prstGeom prst="rect">
             <a:avLst/>
           </a:prstGeom>
+          <a:noFill/>
+          <a:extLst>
+            <a:ext uri="{909E8E84-426E-40DD-AFC4-6F175D3DCCD1}">
+              <a14:hiddenFill xmlns:a14="http://schemas.microsoft.com/office/drawing/2010/main">
+                <a:solidFill>
+                  <a:srgbClr val="FFFFFF"/>
+                </a:solidFill>
+              </a14:hiddenFill>
+            </a:ext>
+          </a:extLst>
+        </p:spPr>
+      </p:pic>
+      <p:sp>
+        <p:nvSpPr>
+          <p:cNvPr id="2" name="Заголовок 1">
+            <a:extLst>
+              <a:ext uri="{FF2B5EF4-FFF2-40B4-BE49-F238E27FC236}">
+                <a16:creationId xmlns:a16="http://schemas.microsoft.com/office/drawing/2014/main" id="{016FEA16-26B9-9FBB-88AD-C63E7C24E60F}"/>
+              </a:ext>
+            </a:extLst>
+          </p:cNvPr>
+          <p:cNvSpPr>
+            <a:spLocks noGrp="1"/>
+          </p:cNvSpPr>
+          <p:nvPr>
+            <p:ph type="title"/>
+          </p:nvPr>
+        </p:nvSpPr>
+        <p:spPr>
+          <a:xfrm>
+            <a:off x="838200" y="0"/>
+            <a:ext cx="10515600" cy="1325563"/>
+          </a:xfrm>
+        </p:spPr>
+        <p:txBody>
+          <a:bodyPr/>
+          <a:lstStyle/>
+          <a:p>
+            <a:r>
+              <a:rPr lang="ru-RU" b="1" dirty="0">
+                <a:latin typeface="+mn-lt"/>
+              </a:rPr>
+              <a:t>Интерфейс продукта</a:t>
+            </a:r>
+          </a:p>
+        </p:txBody>
+      </p:sp>
+      <p:sp>
+        <p:nvSpPr>
+          <p:cNvPr id="3" name="Номер слайда 2">
+            <a:extLst>
+              <a:ext uri="{FF2B5EF4-FFF2-40B4-BE49-F238E27FC236}">
+                <a16:creationId xmlns:a16="http://schemas.microsoft.com/office/drawing/2014/main" id="{3CE7BEB4-4E75-1AF9-9F73-91FCD2548E72}"/>
+              </a:ext>
+            </a:extLst>
+          </p:cNvPr>
+          <p:cNvSpPr>
+            <a:spLocks noGrp="1"/>
+          </p:cNvSpPr>
+          <p:nvPr>
+            <p:ph type="sldNum" sz="quarter" idx="12"/>
+          </p:nvPr>
+        </p:nvSpPr>
+        <p:spPr/>
+        <p:txBody>
+          <a:bodyPr/>
+          <a:lstStyle/>
+          <a:p>
+            <a:fld id="{C792C54E-EFF1-4B00-8652-01128ACE980F}" type="slidenum">
+              <a:rPr lang="ru-RU" smtClean="0"/>
+              <a:pPr/>
+              <a:t>8</a:t>
+            </a:fld>
+            <a:endParaRPr lang="ru-RU"/>
+          </a:p>
+        </p:txBody>
+      </p:sp>
+      <p:sp>
+        <p:nvSpPr>
+          <p:cNvPr id="4" name="Объект 6">
+            <a:extLst>
+              <a:ext uri="{FF2B5EF4-FFF2-40B4-BE49-F238E27FC236}">
+                <a16:creationId xmlns:a16="http://schemas.microsoft.com/office/drawing/2014/main" id="{6241999D-BF00-C0CC-A15F-AF0C89A133BA}"/>
+              </a:ext>
+            </a:extLst>
+          </p:cNvPr>
+          <p:cNvSpPr>
+            <a:spLocks noGrp="1"/>
+          </p:cNvSpPr>
+          <p:nvPr>
+            <p:ph idx="1"/>
+          </p:nvPr>
+        </p:nvSpPr>
+        <p:spPr>
+          <a:xfrm>
+            <a:off x="4441522" y="5710639"/>
+            <a:ext cx="3128356" cy="391402"/>
+          </a:xfrm>
+        </p:spPr>
+        <p:txBody>
+          <a:bodyPr>
+            <a:normAutofit lnSpcReduction="10000"/>
+          </a:bodyPr>
+          <a:lstStyle/>
+          <a:p>
+            <a:pPr marL="0" indent="0">
+              <a:buNone/>
+            </a:pPr>
+            <a:r>
+              <a:rPr lang="ru-RU" sz="2400" dirty="0">
+                <a:cs typeface="Times New Roman" panose="02020603050405020304" pitchFamily="18" charset="0"/>
+              </a:rPr>
+              <a:t>Окно входа в систему</a:t>
+            </a:r>
+          </a:p>
+          <a:p>
+            <a:pPr marL="0" indent="0">
+              <a:buNone/>
+            </a:pPr>
+            <a:endParaRPr lang="ru-RU" sz="2400" dirty="0">
+              <a:cs typeface="Times New Roman" panose="02020603050405020304" pitchFamily="18" charset="0"/>
+            </a:endParaRPr>
+          </a:p>
+        </p:txBody>
+      </p:sp>
+      <p:pic>
+        <p:nvPicPr>
+          <p:cNvPr id="6148" name="Picture 4">
+            <a:extLst>
+              <a:ext uri="{FF2B5EF4-FFF2-40B4-BE49-F238E27FC236}">
+                <a16:creationId xmlns:a16="http://schemas.microsoft.com/office/drawing/2014/main" id="{AE910AD1-53BC-F506-BFB4-FEFDDCC6F692}"/>
+              </a:ext>
+            </a:extLst>
+          </p:cNvPr>
+          <p:cNvPicPr>
+            <a:picLocks noChangeAspect="1" noChangeArrowheads="1"/>
+          </p:cNvPicPr>
+          <p:nvPr/>
+        </p:nvPicPr>
+        <p:blipFill>
+          <a:blip r:embed="rId3">
+            <a:extLst>
+              <a:ext uri="{28A0092B-C50C-407E-A947-70E740481C1C}">
+                <a14:useLocalDpi xmlns:a14="http://schemas.microsoft.com/office/drawing/2010/main" val="0"/>
+              </a:ext>
+            </a:extLst>
+          </a:blip>
+          <a:srcRect/>
+          <a:stretch>
+            <a:fillRect/>
+          </a:stretch>
+        </p:blipFill>
+        <p:spPr bwMode="auto">
+          <a:xfrm>
+            <a:off x="1986852" y="1401669"/>
+            <a:ext cx="7881498" cy="4054662"/>
+          </a:xfrm>
+          <a:prstGeom prst="rect">
+            <a:avLst/>
+          </a:prstGeom>
+          <a:noFill/>
+          <a:extLst>
+            <a:ext uri="{909E8E84-426E-40DD-AFC4-6F175D3DCCD1}">
+              <a14:hiddenFill xmlns:a14="http://schemas.microsoft.com/office/drawing/2010/main">
+                <a:solidFill>
+                  <a:srgbClr val="FFFFFF"/>
+                </a:solidFill>
+              </a14:hiddenFill>
+            </a:ext>
+          </a:extLst>
         </p:spPr>
       </p:pic>
     </p:spTree>
+    <p:extLst>
+      <p:ext uri="{BB962C8B-B14F-4D97-AF65-F5344CB8AC3E}">
+        <p14:creationId xmlns:p14="http://schemas.microsoft.com/office/powerpoint/2010/main" val="248056189"/>
+      </p:ext>
+    </p:extLst>
   </p:cSld>
   <p:clrMapOvr>
     <a:masterClrMapping/>
@@ -5757,7 +7167,7 @@
         <p:cNvPr id="1" name="">
           <a:extLst>
             <a:ext uri="{FF2B5EF4-FFF2-40B4-BE49-F238E27FC236}">
-              <a16:creationId xmlns:a16="http://schemas.microsoft.com/office/drawing/2014/main" id="{AE8C6368-DC0E-2816-0C34-9AF31F80DAF5}"/>
+              <a16:creationId xmlns:a16="http://schemas.microsoft.com/office/drawing/2014/main" id="{2CF80C0C-3D0B-4798-D0F8-D8BC6E18188C}"/>
             </a:ext>
           </a:extLst>
         </p:cNvPr>
@@ -5772,68 +7182,191 @@
           <a:chExt cx="0" cy="0"/>
         </a:xfrm>
       </p:grpSpPr>
-      <p:sp>
-        <p:nvSpPr>
-          <p:cNvPr id="2" name="Заголовок 1">
-            <a:extLst>
-              <a:ext uri="{FF2B5EF4-FFF2-40B4-BE49-F238E27FC236}">
-                <a16:creationId xmlns:a16="http://schemas.microsoft.com/office/drawing/2014/main" id="{F4358553-CB87-61FE-2FC8-83E183DCE76C}"/>
-              </a:ext>
-            </a:extLst>
-          </p:cNvPr>
-          <p:cNvSpPr>
-            <a:spLocks noGrp="1"/>
-          </p:cNvSpPr>
-          <p:nvPr>
-            <p:ph type="title"/>
-          </p:nvPr>
-        </p:nvSpPr>
-        <p:spPr/>
-        <p:txBody>
-          <a:bodyPr/>
-          <a:lstStyle/>
-          <a:p>
-            <a:r>
-              <a:rPr lang="ru-RU" dirty="0"/>
-              <a:t>Макет веб-клиента</a:t>
-            </a:r>
-          </a:p>
-        </p:txBody>
-      </p:sp>
       <p:pic>
         <p:nvPicPr>
-          <p:cNvPr id="10" name="Рисунок 9">
-            <a:extLst>
-              <a:ext uri="{FF2B5EF4-FFF2-40B4-BE49-F238E27FC236}">
-                <a16:creationId xmlns:a16="http://schemas.microsoft.com/office/drawing/2014/main" id="{32E8F9CA-869D-A9D9-DD4B-7BC300E339D2}"/>
+          <p:cNvPr id="4100" name="Picture 4">
+            <a:extLst>
+              <a:ext uri="{FF2B5EF4-FFF2-40B4-BE49-F238E27FC236}">
+                <a16:creationId xmlns:a16="http://schemas.microsoft.com/office/drawing/2014/main" id="{A5D6C6DE-E43A-F39F-75D2-1104F71AFED0}"/>
               </a:ext>
             </a:extLst>
           </p:cNvPr>
           <p:cNvPicPr>
-            <a:picLocks noChangeAspect="1"/>
+            <a:picLocks noChangeAspect="1" noChangeArrowheads="1"/>
           </p:cNvPicPr>
           <p:nvPr/>
         </p:nvPicPr>
         <p:blipFill>
-          <a:blip r:embed="rId2"/>
+          <a:blip r:embed="rId2">
+            <a:extLst>
+              <a:ext uri="{28A0092B-C50C-407E-A947-70E740481C1C}">
+                <a14:useLocalDpi xmlns:a14="http://schemas.microsoft.com/office/drawing/2010/main" val="0"/>
+              </a:ext>
+            </a:extLst>
+          </a:blip>
+          <a:srcRect/>
           <a:stretch>
             <a:fillRect/>
           </a:stretch>
         </p:blipFill>
-        <p:spPr>
+        <p:spPr bwMode="auto">
           <a:xfrm>
-            <a:off x="926691" y="1540825"/>
-            <a:ext cx="6902151" cy="4959424"/>
+            <a:off x="838200" y="1314335"/>
+            <a:ext cx="9920098" cy="4541545"/>
           </a:xfrm>
           <a:prstGeom prst="rect">
             <a:avLst/>
           </a:prstGeom>
+          <a:noFill/>
+          <a:extLst>
+            <a:ext uri="{909E8E84-426E-40DD-AFC4-6F175D3DCCD1}">
+              <a14:hiddenFill xmlns:a14="http://schemas.microsoft.com/office/drawing/2010/main">
+                <a:solidFill>
+                  <a:srgbClr val="FFFFFF"/>
+                </a:solidFill>
+              </a14:hiddenFill>
+            </a:ext>
+          </a:extLst>
         </p:spPr>
       </p:pic>
+      <p:sp>
+        <p:nvSpPr>
+          <p:cNvPr id="2" name="Заголовок 1">
+            <a:extLst>
+              <a:ext uri="{FF2B5EF4-FFF2-40B4-BE49-F238E27FC236}">
+                <a16:creationId xmlns:a16="http://schemas.microsoft.com/office/drawing/2014/main" id="{AF753F7E-A2DB-E46D-1FCB-FCA6AF55694C}"/>
+              </a:ext>
+            </a:extLst>
+          </p:cNvPr>
+          <p:cNvSpPr>
+            <a:spLocks noGrp="1"/>
+          </p:cNvSpPr>
+          <p:nvPr>
+            <p:ph type="title"/>
+          </p:nvPr>
+        </p:nvSpPr>
+        <p:spPr>
+          <a:xfrm>
+            <a:off x="838200" y="0"/>
+            <a:ext cx="10515600" cy="1325563"/>
+          </a:xfrm>
+        </p:spPr>
+        <p:txBody>
+          <a:bodyPr/>
+          <a:lstStyle/>
+          <a:p>
+            <a:r>
+              <a:rPr lang="ru-RU" b="1" dirty="0">
+                <a:latin typeface="+mn-lt"/>
+              </a:rPr>
+              <a:t>Интерфейс продукта</a:t>
+            </a:r>
+          </a:p>
+        </p:txBody>
+      </p:sp>
+      <p:sp>
+        <p:nvSpPr>
+          <p:cNvPr id="3" name="Номер слайда 2">
+            <a:extLst>
+              <a:ext uri="{FF2B5EF4-FFF2-40B4-BE49-F238E27FC236}">
+                <a16:creationId xmlns:a16="http://schemas.microsoft.com/office/drawing/2014/main" id="{2660AD78-9BD8-56CD-7F5C-A3277723456C}"/>
+              </a:ext>
+            </a:extLst>
+          </p:cNvPr>
+          <p:cNvSpPr>
+            <a:spLocks noGrp="1"/>
+          </p:cNvSpPr>
+          <p:nvPr>
+            <p:ph type="sldNum" sz="quarter" idx="12"/>
+          </p:nvPr>
+        </p:nvSpPr>
+        <p:spPr/>
+        <p:txBody>
+          <a:bodyPr/>
+          <a:lstStyle/>
+          <a:p>
+            <a:fld id="{C792C54E-EFF1-4B00-8652-01128ACE980F}" type="slidenum">
+              <a:rPr lang="ru-RU" smtClean="0"/>
+              <a:pPr/>
+              <a:t>9</a:t>
+            </a:fld>
+            <a:endParaRPr lang="ru-RU"/>
+          </a:p>
+        </p:txBody>
+      </p:sp>
+      <p:sp>
+        <p:nvSpPr>
+          <p:cNvPr id="4" name="Объект 6">
+            <a:extLst>
+              <a:ext uri="{FF2B5EF4-FFF2-40B4-BE49-F238E27FC236}">
+                <a16:creationId xmlns:a16="http://schemas.microsoft.com/office/drawing/2014/main" id="{90E6089E-48E2-B130-19F5-4D73C148931F}"/>
+              </a:ext>
+            </a:extLst>
+          </p:cNvPr>
+          <p:cNvSpPr>
+            <a:spLocks noGrp="1"/>
+          </p:cNvSpPr>
+          <p:nvPr>
+            <p:ph idx="1"/>
+          </p:nvPr>
+        </p:nvSpPr>
+        <p:spPr>
+          <a:xfrm>
+            <a:off x="3846022" y="5892166"/>
+            <a:ext cx="4764578" cy="391402"/>
+          </a:xfrm>
+        </p:spPr>
+        <p:txBody>
+          <a:bodyPr>
+            <a:normAutofit lnSpcReduction="10000"/>
+          </a:bodyPr>
+          <a:lstStyle/>
+          <a:p>
+            <a:pPr marL="0" indent="0">
+              <a:buNone/>
+            </a:pPr>
+            <a:r>
+              <a:rPr lang="ru-RU" sz="2400" dirty="0">
+                <a:cs typeface="Times New Roman" panose="02020603050405020304" pitchFamily="18" charset="0"/>
+              </a:rPr>
+              <a:t>Страница </a:t>
+            </a:r>
+            <a:r>
+              <a:rPr lang="en-US" sz="2400" dirty="0">
+                <a:cs typeface="Times New Roman" panose="02020603050405020304" pitchFamily="18" charset="0"/>
+              </a:rPr>
+              <a:t>“</a:t>
+            </a:r>
+            <a:r>
+              <a:rPr lang="ru-RU" sz="2400" dirty="0">
+                <a:cs typeface="Times New Roman" panose="02020603050405020304" pitchFamily="18" charset="0"/>
+              </a:rPr>
+              <a:t>Управление образами</a:t>
+            </a:r>
+            <a:r>
+              <a:rPr lang="en-US" sz="2400" dirty="0">
+                <a:cs typeface="Times New Roman" panose="02020603050405020304" pitchFamily="18" charset="0"/>
+              </a:rPr>
+              <a:t>”</a:t>
+            </a:r>
+            <a:endParaRPr lang="ru-RU" sz="2400" dirty="0">
+              <a:cs typeface="Times New Roman" panose="02020603050405020304" pitchFamily="18" charset="0"/>
+            </a:endParaRPr>
+          </a:p>
+          <a:p>
+            <a:pPr marL="0" indent="0">
+              <a:buNone/>
+            </a:pPr>
+            <a:endParaRPr lang="ru-RU" sz="2400" dirty="0">
+              <a:cs typeface="Times New Roman" panose="02020603050405020304" pitchFamily="18" charset="0"/>
+            </a:endParaRPr>
+          </a:p>
+        </p:txBody>
+      </p:sp>
     </p:spTree>
     <p:extLst>
       <p:ext uri="{BB962C8B-B14F-4D97-AF65-F5344CB8AC3E}">
-        <p14:creationId xmlns:p14="http://schemas.microsoft.com/office/powerpoint/2010/main" val="2541083545"/>
+        <p14:creationId xmlns:p14="http://schemas.microsoft.com/office/powerpoint/2010/main" val="3313401522"/>
       </p:ext>
     </p:extLst>
   </p:cSld>
